--- a/ppt/磁场对运动电荷的作用力.pptx
+++ b/ppt/磁场对运动电荷的作用力.pptx
@@ -5,7 +5,7 @@
     <p:sldMasterId id="2147483648" r:id="rId1"/>
   </p:sldMasterIdLst>
   <p:notesMasterIdLst>
-    <p:notesMasterId r:id="rId15"/>
+    <p:notesMasterId r:id="rId19"/>
   </p:notesMasterIdLst>
   <p:sldIdLst>
     <p:sldId id="256" r:id="rId2"/>
@@ -21,6 +21,10 @@
     <p:sldId id="806" r:id="rId12"/>
     <p:sldId id="807" r:id="rId13"/>
     <p:sldId id="826" r:id="rId14"/>
+    <p:sldId id="381" r:id="rId15"/>
+    <p:sldId id="337" r:id="rId16"/>
+    <p:sldId id="341" r:id="rId17"/>
+    <p:sldId id="383" r:id="rId18"/>
   </p:sldIdLst>
   <p:sldSz cx="12192000" cy="6858000"/>
   <p:notesSz cx="6858000" cy="9144000"/>
@@ -209,7 +213,7 @@
           <a:p>
             <a:fld id="{629C788E-489D-4B4A-94DB-37676E545BF9}" type="datetimeFigureOut">
               <a:rPr lang="en-US" smtClean="0"/>
-              <a:t>10/26/26</a:t>
+              <a:t>10/28/26</a:t>
             </a:fld>
             <a:endParaRPr lang="en-US"/>
           </a:p>
@@ -724,7 +728,7 @@
           <a:p>
             <a:fld id="{8CA95057-F28B-4021-A46F-4C2D267CFC9D}" type="datetimeFigureOut">
               <a:rPr lang="en-US" smtClean="0"/>
-              <a:t>10/26/26</a:t>
+              <a:t>10/28/26</a:t>
             </a:fld>
             <a:endParaRPr lang="en-US"/>
           </a:p>
@@ -967,7 +971,7 @@
           <a:p>
             <a:fld id="{8CA95057-F28B-4021-A46F-4C2D267CFC9D}" type="datetimeFigureOut">
               <a:rPr lang="en-US" smtClean="0"/>
-              <a:t>10/26/26</a:t>
+              <a:t>10/28/26</a:t>
             </a:fld>
             <a:endParaRPr lang="en-US"/>
           </a:p>
@@ -1146,7 +1150,7 @@
           <a:p>
             <a:fld id="{8CA95057-F28B-4021-A46F-4C2D267CFC9D}" type="datetimeFigureOut">
               <a:rPr lang="en-US" smtClean="0"/>
-              <a:t>10/26/26</a:t>
+              <a:t>10/28/26</a:t>
             </a:fld>
             <a:endParaRPr lang="en-US"/>
           </a:p>
@@ -1303,7 +1307,7 @@
           <a:p>
             <a:fld id="{8CA95057-F28B-4021-A46F-4C2D267CFC9D}" type="datetimeFigureOut">
               <a:rPr lang="en-US" smtClean="0"/>
-              <a:t>10/26/26</a:t>
+              <a:t>10/28/26</a:t>
             </a:fld>
             <a:endParaRPr lang="en-US"/>
           </a:p>
@@ -1581,7 +1585,7 @@
           <a:p>
             <a:fld id="{8CA95057-F28B-4021-A46F-4C2D267CFC9D}" type="datetimeFigureOut">
               <a:rPr lang="en-US" smtClean="0"/>
-              <a:t>10/26/26</a:t>
+              <a:t>10/28/26</a:t>
             </a:fld>
             <a:endParaRPr lang="en-US"/>
           </a:p>
@@ -2006,7 +2010,7 @@
           <a:p>
             <a:fld id="{8CA95057-F28B-4021-A46F-4C2D267CFC9D}" type="datetimeFigureOut">
               <a:rPr lang="en-US" smtClean="0"/>
-              <a:t>10/26/26</a:t>
+              <a:t>10/28/26</a:t>
             </a:fld>
             <a:endParaRPr lang="en-US"/>
           </a:p>
@@ -2358,6 +2362,846 @@
 </p:sldLayout>
 </file>
 
+<file path=ppt/slideLayouts/slideLayout9.xml><?xml version="1.0" encoding="utf-8"?>
+<p:sldLayout xmlns:a="http://schemas.openxmlformats.org/drawingml/2006/main" xmlns:r="http://schemas.openxmlformats.org/officeDocument/2006/relationships" xmlns:p="http://schemas.openxmlformats.org/presentationml/2006/main" userDrawn="1">
+  <p:cSld name="自定义版式">
+    <p:spTree>
+      <p:nvGrpSpPr>
+        <p:cNvPr id="1" name=""/>
+        <p:cNvGrpSpPr/>
+        <p:nvPr/>
+      </p:nvGrpSpPr>
+      <p:grpSpPr>
+        <a:xfrm>
+          <a:off x="0" y="0"/>
+          <a:ext cx="0" cy="0"/>
+          <a:chOff x="0" y="0"/>
+          <a:chExt cx="0" cy="0"/>
+        </a:xfrm>
+      </p:grpSpPr>
+      <p:sp>
+        <p:nvSpPr>
+          <p:cNvPr id="4" name="圆角矩形 3">
+            <a:hlinkClick r:id="rId2" action="ppaction://hlinksldjump"/>
+          </p:cNvPr>
+          <p:cNvSpPr/>
+          <p:nvPr userDrawn="1"/>
+        </p:nvSpPr>
+        <p:spPr>
+          <a:xfrm>
+            <a:off x="11519592" y="6475887"/>
+            <a:ext cx="554462" cy="270504"/>
+          </a:xfrm>
+          <a:prstGeom prst="roundRect">
+            <a:avLst/>
+          </a:prstGeom>
+          <a:solidFill>
+            <a:schemeClr val="accent1">
+              <a:lumMod val="75000"/>
+            </a:schemeClr>
+          </a:solidFill>
+          <a:ln>
+            <a:noFill/>
+          </a:ln>
+          <a:effectLst>
+            <a:outerShdw blurRad="76200" dist="12700" dir="2700000" sy="-23000" kx="-800400" algn="bl" rotWithShape="0">
+              <a:prstClr val="black">
+                <a:alpha val="20000"/>
+              </a:prstClr>
+            </a:outerShdw>
+          </a:effectLst>
+          <a:scene3d>
+            <a:camera prst="orthographicFront">
+              <a:rot lat="0" lon="0" rev="0"/>
+            </a:camera>
+            <a:lightRig rig="contrasting" dir="t">
+              <a:rot lat="0" lon="0" rev="7800000"/>
+            </a:lightRig>
+          </a:scene3d>
+          <a:sp3d>
+            <a:bevelT w="139700" h="139700"/>
+          </a:sp3d>
+        </p:spPr>
+        <p:style>
+          <a:lnRef idx="2">
+            <a:schemeClr val="accent1">
+              <a:shade val="50000"/>
+            </a:schemeClr>
+          </a:lnRef>
+          <a:fillRef idx="1">
+            <a:schemeClr val="accent1"/>
+          </a:fillRef>
+          <a:effectRef idx="0">
+            <a:schemeClr val="accent1"/>
+          </a:effectRef>
+          <a:fontRef idx="minor">
+            <a:schemeClr val="lt1"/>
+          </a:fontRef>
+        </p:style>
+        <p:txBody>
+          <a:bodyPr rtlCol="0" anchor="ctr"/>
+          <a:lstStyle/>
+          <a:p>
+            <a:pPr algn="ctr"/>
+            <a:endParaRPr lang="zh-CN" altLang="en-US"/>
+          </a:p>
+        </p:txBody>
+      </p:sp>
+      <p:sp>
+        <p:nvSpPr>
+          <p:cNvPr id="5" name="TextBox 26">
+            <a:hlinkClick r:id="rId3" action="ppaction://hlinksldjump"/>
+          </p:cNvPr>
+          <p:cNvSpPr txBox="1"/>
+          <p:nvPr userDrawn="1"/>
+        </p:nvSpPr>
+        <p:spPr>
+          <a:xfrm>
+            <a:off x="11519866" y="6453601"/>
+            <a:ext cx="598563" cy="292388"/>
+          </a:xfrm>
+          <a:prstGeom prst="rect">
+            <a:avLst/>
+          </a:prstGeom>
+          <a:noFill/>
+        </p:spPr>
+        <p:txBody>
+          <a:bodyPr wrap="square" rtlCol="0">
+            <a:spAutoFit/>
+          </a:bodyPr>
+          <a:lstStyle>
+            <a:defPPr>
+              <a:defRPr lang="zh-CN"/>
+            </a:defPPr>
+            <a:lvl1pPr marL="0" algn="l" defTabSz="913765" rtl="0" eaLnBrk="1" latinLnBrk="0" hangingPunct="1">
+              <a:defRPr sz="1900" kern="1200">
+                <a:solidFill>
+                  <a:schemeClr val="tx1"/>
+                </a:solidFill>
+                <a:latin typeface="+mn-lt"/>
+                <a:ea typeface="+mn-ea"/>
+                <a:cs typeface="+mn-cs"/>
+              </a:defRPr>
+            </a:lvl1pPr>
+            <a:lvl2pPr marL="457200" algn="l" defTabSz="913765" rtl="0" eaLnBrk="1" latinLnBrk="0" hangingPunct="1">
+              <a:defRPr sz="1900" kern="1200">
+                <a:solidFill>
+                  <a:schemeClr val="tx1"/>
+                </a:solidFill>
+                <a:latin typeface="+mn-lt"/>
+                <a:ea typeface="+mn-ea"/>
+                <a:cs typeface="+mn-cs"/>
+              </a:defRPr>
+            </a:lvl2pPr>
+            <a:lvl3pPr marL="914400" algn="l" defTabSz="913765" rtl="0" eaLnBrk="1" latinLnBrk="0" hangingPunct="1">
+              <a:defRPr sz="1900" kern="1200">
+                <a:solidFill>
+                  <a:schemeClr val="tx1"/>
+                </a:solidFill>
+                <a:latin typeface="+mn-lt"/>
+                <a:ea typeface="+mn-ea"/>
+                <a:cs typeface="+mn-cs"/>
+              </a:defRPr>
+            </a:lvl3pPr>
+            <a:lvl4pPr marL="1371600" algn="l" defTabSz="913765" rtl="0" eaLnBrk="1" latinLnBrk="0" hangingPunct="1">
+              <a:defRPr sz="1900" kern="1200">
+                <a:solidFill>
+                  <a:schemeClr val="tx1"/>
+                </a:solidFill>
+                <a:latin typeface="+mn-lt"/>
+                <a:ea typeface="+mn-ea"/>
+                <a:cs typeface="+mn-cs"/>
+              </a:defRPr>
+            </a:lvl4pPr>
+            <a:lvl5pPr marL="1828800" algn="l" defTabSz="913765" rtl="0" eaLnBrk="1" latinLnBrk="0" hangingPunct="1">
+              <a:defRPr sz="1900" kern="1200">
+                <a:solidFill>
+                  <a:schemeClr val="tx1"/>
+                </a:solidFill>
+                <a:latin typeface="+mn-lt"/>
+                <a:ea typeface="+mn-ea"/>
+                <a:cs typeface="+mn-cs"/>
+              </a:defRPr>
+            </a:lvl5pPr>
+            <a:lvl6pPr marL="2286000" algn="l" defTabSz="913765" rtl="0" eaLnBrk="1" latinLnBrk="0" hangingPunct="1">
+              <a:defRPr sz="1900" kern="1200">
+                <a:solidFill>
+                  <a:schemeClr val="tx1"/>
+                </a:solidFill>
+                <a:latin typeface="+mn-lt"/>
+                <a:ea typeface="+mn-ea"/>
+                <a:cs typeface="+mn-cs"/>
+              </a:defRPr>
+            </a:lvl6pPr>
+            <a:lvl7pPr marL="2743200" algn="l" defTabSz="913765" rtl="0" eaLnBrk="1" latinLnBrk="0" hangingPunct="1">
+              <a:defRPr sz="1900" kern="1200">
+                <a:solidFill>
+                  <a:schemeClr val="tx1"/>
+                </a:solidFill>
+                <a:latin typeface="+mn-lt"/>
+                <a:ea typeface="+mn-ea"/>
+                <a:cs typeface="+mn-cs"/>
+              </a:defRPr>
+            </a:lvl7pPr>
+            <a:lvl8pPr marL="3200400" algn="l" defTabSz="913765" rtl="0" eaLnBrk="1" latinLnBrk="0" hangingPunct="1">
+              <a:defRPr sz="1900" kern="1200">
+                <a:solidFill>
+                  <a:schemeClr val="tx1"/>
+                </a:solidFill>
+                <a:latin typeface="+mn-lt"/>
+                <a:ea typeface="+mn-ea"/>
+                <a:cs typeface="+mn-cs"/>
+              </a:defRPr>
+            </a:lvl8pPr>
+            <a:lvl9pPr marL="3657600" algn="l" defTabSz="913765" rtl="0" eaLnBrk="1" latinLnBrk="0" hangingPunct="1">
+              <a:defRPr sz="1900" kern="1200">
+                <a:solidFill>
+                  <a:schemeClr val="tx1"/>
+                </a:solidFill>
+                <a:latin typeface="+mn-lt"/>
+                <a:ea typeface="+mn-ea"/>
+                <a:cs typeface="+mn-cs"/>
+              </a:defRPr>
+            </a:lvl9pPr>
+          </a:lstStyle>
+          <a:p>
+            <a:pPr marL="0" marR="0" lvl="0" indent="0" algn="l" defTabSz="913765" rtl="0" eaLnBrk="1" fontAlgn="auto" latinLnBrk="0" hangingPunct="1">
+              <a:lnSpc>
+                <a:spcPct val="100000"/>
+              </a:lnSpc>
+              <a:spcBef>
+                <a:spcPts val="0"/>
+              </a:spcBef>
+              <a:spcAft>
+                <a:spcPts val="0"/>
+              </a:spcAft>
+              <a:buClrTx/>
+              <a:buSzTx/>
+              <a:buFontTx/>
+              <a:buNone/>
+              <a:defRPr/>
+            </a:pPr>
+            <a:r>
+              <a:rPr kumimoji="0" lang="zh-CN" altLang="en-US" sz="1300" b="0" i="0" u="none" strike="noStrike" kern="1200" cap="none" spc="0" normalizeH="0" baseline="0" noProof="0" dirty="0">
+                <a:ln>
+                  <a:noFill/>
+                </a:ln>
+                <a:solidFill>
+                  <a:schemeClr val="bg1"/>
+                </a:solidFill>
+                <a:effectLst/>
+                <a:uLnTx/>
+                <a:uFillTx/>
+                <a:latin typeface="微软雅黑" panose="020B0503020204020204" pitchFamily="34" charset="-122"/>
+                <a:ea typeface="微软雅黑" panose="020B0503020204020204" pitchFamily="34" charset="-122"/>
+                <a:cs typeface="+mn-cs"/>
+              </a:rPr>
+              <a:t>目 录</a:t>
+            </a:r>
+          </a:p>
+        </p:txBody>
+      </p:sp>
+      <p:sp>
+        <p:nvSpPr>
+          <p:cNvPr id="6" name="TextBox 26"/>
+          <p:cNvSpPr txBox="1"/>
+          <p:nvPr userDrawn="1"/>
+        </p:nvSpPr>
+        <p:spPr>
+          <a:xfrm>
+            <a:off x="706381" y="28047"/>
+            <a:ext cx="3217919" cy="307777"/>
+          </a:xfrm>
+          <a:prstGeom prst="rect">
+            <a:avLst/>
+          </a:prstGeom>
+          <a:noFill/>
+        </p:spPr>
+        <p:txBody>
+          <a:bodyPr wrap="square" rtlCol="0">
+            <a:spAutoFit/>
+          </a:bodyPr>
+          <a:lstStyle>
+            <a:defPPr>
+              <a:defRPr lang="zh-CN"/>
+            </a:defPPr>
+            <a:lvl1pPr marL="0" algn="l" defTabSz="913765" rtl="0" eaLnBrk="1" latinLnBrk="0" hangingPunct="1">
+              <a:defRPr sz="1900" kern="1200">
+                <a:solidFill>
+                  <a:schemeClr val="tx1"/>
+                </a:solidFill>
+                <a:latin typeface="+mn-lt"/>
+                <a:ea typeface="+mn-ea"/>
+                <a:cs typeface="+mn-cs"/>
+              </a:defRPr>
+            </a:lvl1pPr>
+            <a:lvl2pPr marL="457200" algn="l" defTabSz="913765" rtl="0" eaLnBrk="1" latinLnBrk="0" hangingPunct="1">
+              <a:defRPr sz="1900" kern="1200">
+                <a:solidFill>
+                  <a:schemeClr val="tx1"/>
+                </a:solidFill>
+                <a:latin typeface="+mn-lt"/>
+                <a:ea typeface="+mn-ea"/>
+                <a:cs typeface="+mn-cs"/>
+              </a:defRPr>
+            </a:lvl2pPr>
+            <a:lvl3pPr marL="914400" algn="l" defTabSz="913765" rtl="0" eaLnBrk="1" latinLnBrk="0" hangingPunct="1">
+              <a:defRPr sz="1900" kern="1200">
+                <a:solidFill>
+                  <a:schemeClr val="tx1"/>
+                </a:solidFill>
+                <a:latin typeface="+mn-lt"/>
+                <a:ea typeface="+mn-ea"/>
+                <a:cs typeface="+mn-cs"/>
+              </a:defRPr>
+            </a:lvl3pPr>
+            <a:lvl4pPr marL="1371600" algn="l" defTabSz="913765" rtl="0" eaLnBrk="1" latinLnBrk="0" hangingPunct="1">
+              <a:defRPr sz="1900" kern="1200">
+                <a:solidFill>
+                  <a:schemeClr val="tx1"/>
+                </a:solidFill>
+                <a:latin typeface="+mn-lt"/>
+                <a:ea typeface="+mn-ea"/>
+                <a:cs typeface="+mn-cs"/>
+              </a:defRPr>
+            </a:lvl4pPr>
+            <a:lvl5pPr marL="1828800" algn="l" defTabSz="913765" rtl="0" eaLnBrk="1" latinLnBrk="0" hangingPunct="1">
+              <a:defRPr sz="1900" kern="1200">
+                <a:solidFill>
+                  <a:schemeClr val="tx1"/>
+                </a:solidFill>
+                <a:latin typeface="+mn-lt"/>
+                <a:ea typeface="+mn-ea"/>
+                <a:cs typeface="+mn-cs"/>
+              </a:defRPr>
+            </a:lvl5pPr>
+            <a:lvl6pPr marL="2286000" algn="l" defTabSz="913765" rtl="0" eaLnBrk="1" latinLnBrk="0" hangingPunct="1">
+              <a:defRPr sz="1900" kern="1200">
+                <a:solidFill>
+                  <a:schemeClr val="tx1"/>
+                </a:solidFill>
+                <a:latin typeface="+mn-lt"/>
+                <a:ea typeface="+mn-ea"/>
+                <a:cs typeface="+mn-cs"/>
+              </a:defRPr>
+            </a:lvl6pPr>
+            <a:lvl7pPr marL="2743200" algn="l" defTabSz="913765" rtl="0" eaLnBrk="1" latinLnBrk="0" hangingPunct="1">
+              <a:defRPr sz="1900" kern="1200">
+                <a:solidFill>
+                  <a:schemeClr val="tx1"/>
+                </a:solidFill>
+                <a:latin typeface="+mn-lt"/>
+                <a:ea typeface="+mn-ea"/>
+                <a:cs typeface="+mn-cs"/>
+              </a:defRPr>
+            </a:lvl7pPr>
+            <a:lvl8pPr marL="3200400" algn="l" defTabSz="913765" rtl="0" eaLnBrk="1" latinLnBrk="0" hangingPunct="1">
+              <a:defRPr sz="1900" kern="1200">
+                <a:solidFill>
+                  <a:schemeClr val="tx1"/>
+                </a:solidFill>
+                <a:latin typeface="+mn-lt"/>
+                <a:ea typeface="+mn-ea"/>
+                <a:cs typeface="+mn-cs"/>
+              </a:defRPr>
+            </a:lvl8pPr>
+            <a:lvl9pPr marL="3657600" algn="l" defTabSz="913765" rtl="0" eaLnBrk="1" latinLnBrk="0" hangingPunct="1">
+              <a:defRPr sz="1900" kern="1200">
+                <a:solidFill>
+                  <a:schemeClr val="tx1"/>
+                </a:solidFill>
+                <a:latin typeface="+mn-lt"/>
+                <a:ea typeface="+mn-ea"/>
+                <a:cs typeface="+mn-cs"/>
+              </a:defRPr>
+            </a:lvl9pPr>
+          </a:lstStyle>
+          <a:p>
+            <a:pPr marL="0" marR="0" lvl="0" indent="0" algn="l" defTabSz="913765" rtl="0" eaLnBrk="1" fontAlgn="auto" latinLnBrk="0" hangingPunct="1">
+              <a:lnSpc>
+                <a:spcPct val="100000"/>
+              </a:lnSpc>
+              <a:spcBef>
+                <a:spcPts val="0"/>
+              </a:spcBef>
+              <a:spcAft>
+                <a:spcPts val="0"/>
+              </a:spcAft>
+              <a:buClrTx/>
+              <a:buSzTx/>
+              <a:buFontTx/>
+              <a:buNone/>
+              <a:tabLst/>
+              <a:defRPr/>
+            </a:pPr>
+            <a:r>
+              <a:rPr kumimoji="0" lang="zh-CN" altLang="en-US" sz="1400" b="1" i="0" u="none" strike="noStrike" kern="1200" cap="none" spc="0" normalizeH="0" baseline="0" noProof="0" dirty="0">
+                <a:ln>
+                  <a:noFill/>
+                </a:ln>
+                <a:solidFill>
+                  <a:schemeClr val="tx1"/>
+                </a:solidFill>
+                <a:effectLst/>
+                <a:uLnTx/>
+                <a:uFillTx/>
+                <a:latin typeface="方正新报宋_GBK" panose="03000509000000000000" pitchFamily="65" charset="-122"/>
+                <a:ea typeface="方正新报宋_GBK" panose="03000509000000000000" pitchFamily="65" charset="-122"/>
+                <a:cs typeface="+mn-cs"/>
+              </a:rPr>
+              <a:t>物 理</a:t>
+            </a:r>
+            <a:r>
+              <a:rPr kumimoji="0" lang="en-US" altLang="zh-CN" sz="1400" b="1" i="0" u="none" strike="noStrike" kern="1200" cap="none" spc="0" normalizeH="0" baseline="0" noProof="0" dirty="0">
+                <a:ln>
+                  <a:noFill/>
+                </a:ln>
+                <a:solidFill>
+                  <a:schemeClr val="tx1"/>
+                </a:solidFill>
+                <a:effectLst/>
+                <a:uLnTx/>
+                <a:uFillTx/>
+                <a:latin typeface="方正新报宋_GBK" panose="03000509000000000000" pitchFamily="65" charset="-122"/>
+                <a:ea typeface="方正新报宋_GBK" panose="03000509000000000000" pitchFamily="65" charset="-122"/>
+                <a:cs typeface="+mn-cs"/>
+              </a:rPr>
+              <a:t>·</a:t>
+            </a:r>
+            <a:r>
+              <a:rPr kumimoji="0" lang="zh-CN" altLang="en-US" sz="1400" b="1" i="0" u="none" strike="noStrike" kern="1200" cap="none" spc="0" normalizeH="0" baseline="0" noProof="0" dirty="0">
+                <a:ln>
+                  <a:noFill/>
+                </a:ln>
+                <a:solidFill>
+                  <a:schemeClr val="tx1"/>
+                </a:solidFill>
+                <a:effectLst/>
+                <a:uLnTx/>
+                <a:uFillTx/>
+                <a:latin typeface="方正新报宋_GBK" panose="03000509000000000000" pitchFamily="65" charset="-122"/>
+                <a:ea typeface="方正新报宋_GBK" panose="03000509000000000000" pitchFamily="65" charset="-122"/>
+                <a:cs typeface="+mn-cs"/>
+              </a:rPr>
+              <a:t>选择性必修第二册</a:t>
+            </a:r>
+          </a:p>
+        </p:txBody>
+      </p:sp>
+      <p:cxnSp>
+        <p:nvCxnSpPr>
+          <p:cNvPr id="7" name="直接箭头连接符 6"/>
+          <p:cNvCxnSpPr/>
+          <p:nvPr userDrawn="1"/>
+        </p:nvCxnSpPr>
+        <p:spPr>
+          <a:xfrm>
+            <a:off x="773038" y="366455"/>
+            <a:ext cx="11377264" cy="0"/>
+          </a:xfrm>
+          <a:prstGeom prst="straightConnector1">
+            <a:avLst/>
+          </a:prstGeom>
+          <a:ln>
+            <a:solidFill>
+              <a:schemeClr val="accent1"/>
+            </a:solidFill>
+            <a:prstDash val="dash"/>
+            <a:headEnd type="none" w="med" len="med"/>
+            <a:tailEnd type="none" w="med" len="med"/>
+          </a:ln>
+        </p:spPr>
+        <p:style>
+          <a:lnRef idx="1">
+            <a:schemeClr val="accent1"/>
+          </a:lnRef>
+          <a:fillRef idx="0">
+            <a:schemeClr val="accent1"/>
+          </a:fillRef>
+          <a:effectRef idx="0">
+            <a:schemeClr val="accent1"/>
+          </a:effectRef>
+          <a:fontRef idx="minor">
+            <a:schemeClr val="tx1"/>
+          </a:fontRef>
+        </p:style>
+      </p:cxnSp>
+      <p:sp>
+        <p:nvSpPr>
+          <p:cNvPr id="8" name="矩形 7"/>
+          <p:cNvSpPr/>
+          <p:nvPr userDrawn="1"/>
+        </p:nvSpPr>
+        <p:spPr>
+          <a:xfrm>
+            <a:off x="0" y="-972"/>
+            <a:ext cx="508986" cy="357419"/>
+          </a:xfrm>
+          <a:prstGeom prst="rect">
+            <a:avLst/>
+          </a:prstGeom>
+          <a:solidFill>
+            <a:schemeClr val="accent5">
+              <a:lumMod val="75000"/>
+            </a:schemeClr>
+          </a:solidFill>
+          <a:ln>
+            <a:noFill/>
+          </a:ln>
+        </p:spPr>
+        <p:style>
+          <a:lnRef idx="2">
+            <a:schemeClr val="accent1">
+              <a:shade val="15000"/>
+            </a:schemeClr>
+          </a:lnRef>
+          <a:fillRef idx="1">
+            <a:schemeClr val="accent1"/>
+          </a:fillRef>
+          <a:effectRef idx="0">
+            <a:schemeClr val="accent1"/>
+          </a:effectRef>
+          <a:fontRef idx="minor">
+            <a:schemeClr val="lt1"/>
+          </a:fontRef>
+        </p:style>
+        <p:txBody>
+          <a:bodyPr rtlCol="0" anchor="ctr"/>
+          <a:lstStyle/>
+          <a:p>
+            <a:pPr marR="0" lvl="0" indent="0" algn="ctr" fontAlgn="auto">
+              <a:lnSpc>
+                <a:spcPct val="200000"/>
+              </a:lnSpc>
+              <a:spcBef>
+                <a:spcPts val="0"/>
+              </a:spcBef>
+              <a:spcAft>
+                <a:spcPts val="0"/>
+              </a:spcAft>
+              <a:buClrTx/>
+              <a:buSzTx/>
+              <a:buFontTx/>
+              <a:buNone/>
+              <a:tabLst/>
+            </a:pPr>
+            <a:endParaRPr kumimoji="0" lang="zh-CN" altLang="en-US" b="0" i="0" u="none" strike="noStrike" cap="none" spc="0" normalizeH="0" baseline="0">
+              <a:ln>
+                <a:noFill/>
+              </a:ln>
+              <a:solidFill>
+                <a:prstClr val="white"/>
+              </a:solidFill>
+              <a:effectLst/>
+              <a:uLnTx/>
+              <a:uFillTx/>
+              <a:latin typeface="Microsoft YaHei"/>
+              <a:ea typeface="Microsoft JhengHei"/>
+            </a:endParaRPr>
+          </a:p>
+        </p:txBody>
+      </p:sp>
+      <p:sp>
+        <p:nvSpPr>
+          <p:cNvPr id="9" name="矩形 8"/>
+          <p:cNvSpPr/>
+          <p:nvPr userDrawn="1"/>
+        </p:nvSpPr>
+        <p:spPr>
+          <a:xfrm>
+            <a:off x="580369" y="-4354"/>
+            <a:ext cx="90025" cy="357419"/>
+          </a:xfrm>
+          <a:prstGeom prst="rect">
+            <a:avLst/>
+          </a:prstGeom>
+          <a:solidFill>
+            <a:schemeClr val="accent5">
+              <a:lumMod val="75000"/>
+            </a:schemeClr>
+          </a:solidFill>
+          <a:ln>
+            <a:noFill/>
+          </a:ln>
+        </p:spPr>
+        <p:style>
+          <a:lnRef idx="2">
+            <a:schemeClr val="accent1">
+              <a:shade val="15000"/>
+            </a:schemeClr>
+          </a:lnRef>
+          <a:fillRef idx="1">
+            <a:schemeClr val="accent1"/>
+          </a:fillRef>
+          <a:effectRef idx="0">
+            <a:schemeClr val="accent1"/>
+          </a:effectRef>
+          <a:fontRef idx="minor">
+            <a:schemeClr val="lt1"/>
+          </a:fontRef>
+        </p:style>
+        <p:txBody>
+          <a:bodyPr rtlCol="0" anchor="ctr"/>
+          <a:lstStyle/>
+          <a:p>
+            <a:pPr marR="0" lvl="0" indent="0" algn="ctr" fontAlgn="auto">
+              <a:lnSpc>
+                <a:spcPct val="200000"/>
+              </a:lnSpc>
+              <a:spcBef>
+                <a:spcPts val="0"/>
+              </a:spcBef>
+              <a:spcAft>
+                <a:spcPts val="0"/>
+              </a:spcAft>
+              <a:buClrTx/>
+              <a:buSzTx/>
+              <a:buFontTx/>
+              <a:buNone/>
+              <a:tabLst/>
+            </a:pPr>
+            <a:endParaRPr kumimoji="0" lang="zh-CN" altLang="en-US" b="0" i="0" u="none" strike="noStrike" cap="none" spc="0" normalizeH="0" baseline="0">
+              <a:ln>
+                <a:noFill/>
+              </a:ln>
+              <a:solidFill>
+                <a:prstClr val="white"/>
+              </a:solidFill>
+              <a:effectLst/>
+              <a:uLnTx/>
+              <a:uFillTx/>
+              <a:latin typeface="Microsoft YaHei"/>
+              <a:ea typeface="Microsoft JhengHei"/>
+            </a:endParaRPr>
+          </a:p>
+        </p:txBody>
+      </p:sp>
+    </p:spTree>
+    <p:extLst>
+      <p:ext uri="{BB962C8B-B14F-4D97-AF65-F5344CB8AC3E}">
+        <p14:creationId xmlns:p14="http://schemas.microsoft.com/office/powerpoint/2010/main" val="908671801"/>
+      </p:ext>
+    </p:extLst>
+  </p:cSld>
+  <p:clrMapOvr>
+    <a:masterClrMapping/>
+  </p:clrMapOvr>
+  <mc:AlternateContent xmlns:mc="http://schemas.openxmlformats.org/markup-compatibility/2006" xmlns:p15="http://schemas.microsoft.com/office/powerpoint/2012/main">
+    <mc:Choice Requires="p15">
+      <p:transition xmlns:p14="http://schemas.microsoft.com/office/powerpoint/2010/main" spd="slow" p14:dur="1250">
+        <p15:prstTrans prst="pageCurlDouble"/>
+      </p:transition>
+    </mc:Choice>
+    <mc:Fallback xmlns:p14="http://schemas.microsoft.com/office/powerpoint/2010/main" xmlns="">
+      <p:transition spd="slow">
+        <p:fade/>
+      </p:transition>
+    </mc:Fallback>
+  </mc:AlternateContent>
+  <p:timing>
+    <p:tnLst>
+      <p:par>
+        <p:cTn id="1" dur="indefinite" restart="never" nodeType="tmRoot">
+          <p:childTnLst>
+            <p:seq concurrent="1" nextAc="seek">
+              <p:cTn id="2" dur="indefinite" nodeType="mainSeq">
+                <p:childTnLst>
+                  <p:par>
+                    <p:cTn id="3" fill="hold">
+                      <p:stCondLst>
+                        <p:cond delay="indefinite"/>
+                        <p:cond evt="onBegin" delay="0">
+                          <p:tn val="2"/>
+                        </p:cond>
+                      </p:stCondLst>
+                      <p:childTnLst>
+                        <p:par>
+                          <p:cTn id="4" fill="hold">
+                            <p:stCondLst>
+                              <p:cond delay="0"/>
+                            </p:stCondLst>
+                            <p:childTnLst>
+                              <p:par>
+                                <p:cTn id="5" presetID="2" presetClass="entr" presetSubtype="8" fill="hold" grpId="0" nodeType="withEffect">
+                                  <p:stCondLst>
+                                    <p:cond delay="250"/>
+                                  </p:stCondLst>
+                                  <p:childTnLst>
+                                    <p:set>
+                                      <p:cBhvr>
+                                        <p:cTn id="6" dur="1" fill="hold">
+                                          <p:stCondLst>
+                                            <p:cond delay="0"/>
+                                          </p:stCondLst>
+                                        </p:cTn>
+                                        <p:tgtEl>
+                                          <p:spTgt spid="8"/>
+                                        </p:tgtEl>
+                                        <p:attrNameLst>
+                                          <p:attrName>style.visibility</p:attrName>
+                                        </p:attrNameLst>
+                                      </p:cBhvr>
+                                      <p:to>
+                                        <p:strVal val="visible"/>
+                                      </p:to>
+                                    </p:set>
+                                    <p:anim calcmode="lin" valueType="num">
+                                      <p:cBhvr additive="base">
+                                        <p:cTn id="7" dur="500" fill="hold"/>
+                                        <p:tgtEl>
+                                          <p:spTgt spid="8"/>
+                                        </p:tgtEl>
+                                        <p:attrNameLst>
+                                          <p:attrName>ppt_x</p:attrName>
+                                        </p:attrNameLst>
+                                      </p:cBhvr>
+                                      <p:tavLst>
+                                        <p:tav tm="0">
+                                          <p:val>
+                                            <p:strVal val="0-#ppt_w/2"/>
+                                          </p:val>
+                                        </p:tav>
+                                        <p:tav tm="100000">
+                                          <p:val>
+                                            <p:strVal val="#ppt_x"/>
+                                          </p:val>
+                                        </p:tav>
+                                      </p:tavLst>
+                                    </p:anim>
+                                    <p:anim calcmode="lin" valueType="num">
+                                      <p:cBhvr additive="base">
+                                        <p:cTn id="8" dur="500" fill="hold"/>
+                                        <p:tgtEl>
+                                          <p:spTgt spid="8"/>
+                                        </p:tgtEl>
+                                        <p:attrNameLst>
+                                          <p:attrName>ppt_y</p:attrName>
+                                        </p:attrNameLst>
+                                      </p:cBhvr>
+                                      <p:tavLst>
+                                        <p:tav tm="0">
+                                          <p:val>
+                                            <p:strVal val="#ppt_y"/>
+                                          </p:val>
+                                        </p:tav>
+                                        <p:tav tm="100000">
+                                          <p:val>
+                                            <p:strVal val="#ppt_y"/>
+                                          </p:val>
+                                        </p:tav>
+                                      </p:tavLst>
+                                    </p:anim>
+                                  </p:childTnLst>
+                                </p:cTn>
+                              </p:par>
+                              <p:par>
+                                <p:cTn id="9" presetID="2" presetClass="entr" presetSubtype="8" fill="hold" grpId="0" nodeType="withEffect">
+                                  <p:stCondLst>
+                                    <p:cond delay="250"/>
+                                  </p:stCondLst>
+                                  <p:childTnLst>
+                                    <p:set>
+                                      <p:cBhvr>
+                                        <p:cTn id="10" dur="1" fill="hold">
+                                          <p:stCondLst>
+                                            <p:cond delay="0"/>
+                                          </p:stCondLst>
+                                        </p:cTn>
+                                        <p:tgtEl>
+                                          <p:spTgt spid="9"/>
+                                        </p:tgtEl>
+                                        <p:attrNameLst>
+                                          <p:attrName>style.visibility</p:attrName>
+                                        </p:attrNameLst>
+                                      </p:cBhvr>
+                                      <p:to>
+                                        <p:strVal val="visible"/>
+                                      </p:to>
+                                    </p:set>
+                                    <p:anim calcmode="lin" valueType="num">
+                                      <p:cBhvr additive="base">
+                                        <p:cTn id="11" dur="500" fill="hold"/>
+                                        <p:tgtEl>
+                                          <p:spTgt spid="9"/>
+                                        </p:tgtEl>
+                                        <p:attrNameLst>
+                                          <p:attrName>ppt_x</p:attrName>
+                                        </p:attrNameLst>
+                                      </p:cBhvr>
+                                      <p:tavLst>
+                                        <p:tav tm="0">
+                                          <p:val>
+                                            <p:strVal val="0-#ppt_w/2"/>
+                                          </p:val>
+                                        </p:tav>
+                                        <p:tav tm="100000">
+                                          <p:val>
+                                            <p:strVal val="#ppt_x"/>
+                                          </p:val>
+                                        </p:tav>
+                                      </p:tavLst>
+                                    </p:anim>
+                                    <p:anim calcmode="lin" valueType="num">
+                                      <p:cBhvr additive="base">
+                                        <p:cTn id="12" dur="500" fill="hold"/>
+                                        <p:tgtEl>
+                                          <p:spTgt spid="9"/>
+                                        </p:tgtEl>
+                                        <p:attrNameLst>
+                                          <p:attrName>ppt_y</p:attrName>
+                                        </p:attrNameLst>
+                                      </p:cBhvr>
+                                      <p:tavLst>
+                                        <p:tav tm="0">
+                                          <p:val>
+                                            <p:strVal val="#ppt_y"/>
+                                          </p:val>
+                                        </p:tav>
+                                        <p:tav tm="100000">
+                                          <p:val>
+                                            <p:strVal val="#ppt_y"/>
+                                          </p:val>
+                                        </p:tav>
+                                      </p:tavLst>
+                                    </p:anim>
+                                  </p:childTnLst>
+                                </p:cTn>
+                              </p:par>
+                            </p:childTnLst>
+                          </p:cTn>
+                        </p:par>
+                      </p:childTnLst>
+                    </p:cTn>
+                  </p:par>
+                </p:childTnLst>
+              </p:cTn>
+              <p:prevCondLst>
+                <p:cond evt="onPrev" delay="0">
+                  <p:tgtEl>
+                    <p:sldTgt/>
+                  </p:tgtEl>
+                </p:cond>
+              </p:prevCondLst>
+              <p:nextCondLst>
+                <p:cond evt="onNext" delay="0">
+                  <p:tgtEl>
+                    <p:sldTgt/>
+                  </p:tgtEl>
+                </p:cond>
+              </p:nextCondLst>
+            </p:seq>
+          </p:childTnLst>
+        </p:cTn>
+      </p:par>
+    </p:tnLst>
+    <p:bldLst>
+      <p:bldP spid="8" grpId="0" animBg="1"/>
+      <p:bldP spid="9" grpId="0" animBg="1"/>
+    </p:bldLst>
+  </p:timing>
+</p:sldLayout>
+</file>
+
 <file path=ppt/slideMasters/slideMaster1.xml><?xml version="1.0" encoding="utf-8"?>
 <p:sldMaster xmlns:a="http://schemas.openxmlformats.org/drawingml/2006/main" xmlns:r="http://schemas.openxmlformats.org/officeDocument/2006/relationships" xmlns:p="http://schemas.openxmlformats.org/presentationml/2006/main">
   <p:cSld>
@@ -2528,7 +3372,7 @@
           <a:p>
             <a:fld id="{8CA95057-F28B-4021-A46F-4C2D267CFC9D}" type="datetimeFigureOut">
               <a:rPr lang="en-US" smtClean="0"/>
-              <a:t>10/26/26</a:t>
+              <a:t>10/28/26</a:t>
             </a:fld>
             <a:endParaRPr lang="en-US"/>
           </a:p>
@@ -2641,6 +3485,7 @@
     <p:sldLayoutId id="2147483653" r:id="rId6"/>
     <p:sldLayoutId id="2147483657" r:id="rId7"/>
     <p:sldLayoutId id="2147483658" r:id="rId8"/>
+    <p:sldLayoutId id="2147483659" r:id="rId9"/>
   </p:sldLayoutIdLst>
   <p:txStyles>
     <p:titleStyle>
@@ -4980,6 +5825,3252 @@
 </p:sld>
 </file>
 
+<file path=ppt/slides/slide14.xml><?xml version="1.0" encoding="utf-8"?>
+<p:sld xmlns:a="http://schemas.openxmlformats.org/drawingml/2006/main" xmlns:r="http://schemas.openxmlformats.org/officeDocument/2006/relationships" xmlns:p="http://schemas.openxmlformats.org/presentationml/2006/main">
+  <p:cSld>
+    <p:spTree>
+      <p:nvGrpSpPr>
+        <p:cNvPr id="1" name="YT"/>
+        <p:cNvGrpSpPr/>
+        <p:nvPr/>
+      </p:nvGrpSpPr>
+      <p:grpSpPr>
+        <a:xfrm>
+          <a:off x="0" y="0"/>
+          <a:ext cx="0" cy="0"/>
+          <a:chOff x="0" y="0"/>
+          <a:chExt cx="0" cy="0"/>
+        </a:xfrm>
+      </p:grpSpPr>
+      <p:sp>
+        <p:nvSpPr>
+          <p:cNvPr id="10485" name="yt_shape_10485"/>
+          <p:cNvSpPr txBox="1"/>
+          <p:nvPr/>
+        </p:nvSpPr>
+        <p:spPr>
+          <a:xfrm>
+            <a:off x="324071" y="467999"/>
+            <a:ext cx="11924914" cy="1738681"/>
+          </a:xfrm>
+          <a:prstGeom prst="rect">
+            <a:avLst/>
+          </a:prstGeom>
+        </p:spPr>
+        <p:txBody>
+          <a:bodyPr vert="horz" wrap="square" lIns="0" tIns="0" rIns="0" bIns="0" rtlCol="0">
+            <a:noAutofit/>
+          </a:bodyPr>
+          <a:lstStyle/>
+          <a:p>
+            <a:pPr marL="621665" algn="l" eaLnBrk="1" latinLnBrk="0" hangingPunct="0">
+              <a:lnSpc>
+                <a:spcPct val="140000"/>
+              </a:lnSpc>
+            </a:pPr>
+            <a:r>
+              <a:rPr lang="zh-CN" altLang="zh-CN" sz="2800" b="1" i="0" u="none">
+                <a:solidFill>
+                  <a:srgbClr val="000000"/>
+                </a:solidFill>
+                <a:effectLst/>
+                <a:latin typeface="Times New Roman" pitchFamily="28"/>
+                <a:ea typeface="黑体" pitchFamily="28"/>
+              </a:rPr>
+              <a:t>【例 </a:t>
+            </a:r>
+            <a:r>
+              <a:rPr lang="zh-CN" altLang="zh-CN" sz="2800" b="0" i="0" u="none">
+                <a:solidFill>
+                  <a:srgbClr val="000000"/>
+                </a:solidFill>
+                <a:effectLst/>
+                <a:latin typeface="Times New Roman" pitchFamily="28"/>
+                <a:ea typeface="黑体" pitchFamily="28"/>
+              </a:rPr>
+              <a:t>2</a:t>
+            </a:r>
+            <a:r>
+              <a:rPr lang="zh-CN" altLang="zh-CN" sz="2800" b="1" i="0" u="none">
+                <a:solidFill>
+                  <a:srgbClr val="000000"/>
+                </a:solidFill>
+                <a:effectLst/>
+                <a:latin typeface="Times New Roman" pitchFamily="28"/>
+                <a:ea typeface="黑体" pitchFamily="28"/>
+              </a:rPr>
+              <a:t>】</a:t>
+            </a:r>
+            <a:r>
+              <a:rPr lang="zh-CN" altLang="zh-CN" sz="2800" b="0" i="0" u="none">
+                <a:solidFill>
+                  <a:srgbClr val="000000"/>
+                </a:solidFill>
+                <a:effectLst/>
+                <a:latin typeface="Times New Roman" pitchFamily="28"/>
+                <a:ea typeface="宋体" pitchFamily="28"/>
+              </a:rPr>
+              <a:t> </a:t>
+            </a:r>
+            <a:r>
+              <a:rPr lang="zh-CN" altLang="zh-CN" sz="2800" b="0" i="0" u="none">
+                <a:solidFill>
+                  <a:srgbClr val="000000"/>
+                </a:solidFill>
+                <a:effectLst/>
+                <a:latin typeface="Times New Roman" pitchFamily="28"/>
+                <a:ea typeface="楷体" pitchFamily="28"/>
+              </a:rPr>
+              <a:t>（洛伦兹力的大小和方向）</a:t>
+            </a:r>
+            <a:r>
+              <a:rPr lang="zh-CN" altLang="zh-CN" sz="2800" b="0" i="0" u="none">
+                <a:solidFill>
+                  <a:srgbClr val="000000"/>
+                </a:solidFill>
+                <a:effectLst/>
+                <a:latin typeface="Times New Roman" pitchFamily="28"/>
+                <a:ea typeface="宋体" pitchFamily="28"/>
+                <a:sym typeface="_⨹_14_1d97d"/>
+              </a:rPr>
+              <a:t>如图所示，各图中匀强磁场的磁</a:t>
+            </a:r>
+            <a:br>
+              <a:rPr lang="zh-CN" altLang="zh-CN" sz="2800" b="0" i="0" u="none">
+                <a:solidFill>
+                  <a:srgbClr val="000000"/>
+                </a:solidFill>
+                <a:effectLst/>
+                <a:latin typeface="Times New Roman" pitchFamily="28"/>
+                <a:ea typeface="宋体" pitchFamily="28"/>
+              </a:rPr>
+            </a:br>
+            <a:r>
+              <a:rPr lang="zh-CN" altLang="zh-CN" sz="2800" b="0" i="0" u="none">
+                <a:solidFill>
+                  <a:srgbClr val="000000"/>
+                </a:solidFill>
+                <a:effectLst/>
+                <a:latin typeface="Times New Roman" pitchFamily="28"/>
+                <a:ea typeface="宋体" pitchFamily="28"/>
+              </a:rPr>
+              <a:t>感应强度均为</a:t>
+            </a:r>
+            <a:r>
+              <a:rPr lang="zh-CN" altLang="zh-CN" sz="2800" b="0" i="1" u="none">
+                <a:solidFill>
+                  <a:srgbClr val="000000"/>
+                </a:solidFill>
+                <a:effectLst/>
+                <a:latin typeface="Times New Roman" pitchFamily="28"/>
+                <a:ea typeface="楷体" pitchFamily="28"/>
+              </a:rPr>
+              <a:t>B</a:t>
+            </a:r>
+            <a:r>
+              <a:rPr lang="zh-CN" altLang="zh-CN" sz="2800" b="0" i="0" u="none">
+                <a:solidFill>
+                  <a:srgbClr val="000000"/>
+                </a:solidFill>
+                <a:effectLst/>
+                <a:latin typeface="Times New Roman" pitchFamily="28"/>
+                <a:ea typeface="宋体" pitchFamily="28"/>
+              </a:rPr>
+              <a:t>，带电粒子的速率均为</a:t>
+            </a:r>
+            <a:r>
+              <a:rPr lang="zh-CN" altLang="zh-CN" sz="2800" b="0" i="1" u="none">
+                <a:solidFill>
+                  <a:srgbClr val="000000"/>
+                </a:solidFill>
+                <a:effectLst/>
+                <a:latin typeface="Times New Roman" pitchFamily="28"/>
+                <a:ea typeface="楷体" pitchFamily="28"/>
+              </a:rPr>
+              <a:t>v</a:t>
+            </a:r>
+            <a:r>
+              <a:rPr lang="zh-CN" altLang="zh-CN" sz="2800" b="0" i="0" u="none">
+                <a:solidFill>
+                  <a:srgbClr val="000000"/>
+                </a:solidFill>
+                <a:effectLst/>
+                <a:latin typeface="Times New Roman" pitchFamily="28"/>
+                <a:ea typeface="宋体" pitchFamily="28"/>
+              </a:rPr>
+              <a:t>，带电荷量均为</a:t>
+            </a:r>
+            <a:r>
+              <a:rPr lang="zh-CN" altLang="zh-CN" sz="2800" b="0" i="1" u="none">
+                <a:solidFill>
+                  <a:srgbClr val="000000"/>
+                </a:solidFill>
+                <a:effectLst/>
+                <a:latin typeface="Times New Roman" pitchFamily="28"/>
+                <a:ea typeface="楷体" pitchFamily="28"/>
+              </a:rPr>
+              <a:t>q</a:t>
+            </a:r>
+            <a:r>
+              <a:rPr lang="zh-CN" altLang="zh-CN" sz="2800" b="0" i="0" u="none">
+                <a:solidFill>
+                  <a:srgbClr val="000000"/>
+                </a:solidFill>
+                <a:effectLst/>
+                <a:latin typeface="Times New Roman" pitchFamily="28"/>
+                <a:ea typeface="宋体" pitchFamily="28"/>
+                <a:sym typeface="_⨹_6_9cf6c"/>
+              </a:rPr>
+              <a:t>。试求各图中</a:t>
+            </a:r>
+            <a:br>
+              <a:rPr lang="zh-CN" altLang="zh-CN" sz="2800" b="0" i="0" u="none">
+                <a:solidFill>
+                  <a:srgbClr val="000000"/>
+                </a:solidFill>
+                <a:effectLst/>
+                <a:latin typeface="Times New Roman" pitchFamily="28"/>
+                <a:ea typeface="宋体" pitchFamily="28"/>
+              </a:rPr>
+            </a:br>
+            <a:r>
+              <a:rPr lang="zh-CN" altLang="zh-CN" sz="2800" b="0" i="0" u="none">
+                <a:solidFill>
+                  <a:srgbClr val="000000"/>
+                </a:solidFill>
+                <a:effectLst/>
+                <a:latin typeface="Times New Roman" pitchFamily="28"/>
+                <a:ea typeface="宋体" pitchFamily="28"/>
+              </a:rPr>
+              <a:t>带电粒子所受洛伦兹力的大小，说明洛伦兹力的方向。</a:t>
+            </a:r>
+          </a:p>
+        </p:txBody>
+      </p:sp>
+      <p:pic>
+        <p:nvPicPr>
+          <p:cNvPr id="10486" name="yt_image_10486" title="H_157.24796">
+            <a:extLst>
+              <a:ext uri="">
+                <a16:creationId xmlns:a16="http://schemas.microsoft.com/office/drawing/2014/main" xmlns:p15="http://schemas.microsoft.com/office/powerpoint/2012/main" xmlns:mc="http://schemas.openxmlformats.org/markup-compatibility/2006" xmlns:p14="http://schemas.microsoft.com/office/powerpoint/2010/main" xmlns:a14="http://schemas.microsoft.com/office/drawing/2010/main" xmlns="" id="{5351258F-BC95-41E6-9372-C2FE361B0291}"/>
+              </a:ext>
+            </a:extLst>
+          </p:cNvPr>
+          <p:cNvPicPr>
+            <a:picLocks noChangeAspect="1" noChangeArrowheads="1"/>
+          </p:cNvPicPr>
+          <p:nvPr/>
+        </p:nvPicPr>
+        <p:blipFill>
+          <a:blip r:embed="rId2" cstate="print">
+            <a:extLst>
+              <a:ext uri="{28A0092B-C50C-407E-A947-70E740481C1C}">
+                <a14:useLocalDpi xmlns:a14="http://schemas.microsoft.com/office/drawing/2010/main" val="0"/>
+              </a:ext>
+            </a:extLst>
+          </a:blip>
+          <a:srcRect/>
+          <a:stretch>
+            <a:fillRect/>
+          </a:stretch>
+        </p:blipFill>
+        <p:spPr bwMode="auto">
+          <a:xfrm>
+            <a:off x="2513380" y="2409832"/>
+            <a:ext cx="7165238" cy="1997049"/>
+          </a:xfrm>
+          <a:prstGeom prst="rect">
+            <a:avLst/>
+          </a:prstGeom>
+          <a:noFill/>
+          <a:extLst>
+            <a:ext uri="{909E8E84-426E-40DD-AFC4-6F175D3DCCD1}">
+              <a14:hiddenFill xmlns:a14="http://schemas.microsoft.com/office/drawing/2010/main">
+                <a:solidFill>
+                  <a:srgbClr val="FFFFFF"/>
+                </a:solidFill>
+              </a14:hiddenFill>
+            </a:ext>
+          </a:extLst>
+        </p:spPr>
+      </p:pic>
+      <p:sp>
+        <p:nvSpPr>
+          <p:cNvPr id="10488" name="yt_shape_10488"/>
+          <p:cNvSpPr txBox="1"/>
+          <p:nvPr/>
+        </p:nvSpPr>
+        <p:spPr>
+          <a:xfrm>
+            <a:off x="324000" y="4457228"/>
+            <a:ext cx="6914713" cy="532197"/>
+          </a:xfrm>
+          <a:prstGeom prst="rect">
+            <a:avLst/>
+          </a:prstGeom>
+        </p:spPr>
+        <p:txBody>
+          <a:bodyPr vert="horz" wrap="none" lIns="0" tIns="0" rIns="0" bIns="0" rtlCol="0">
+            <a:noAutofit/>
+          </a:bodyPr>
+          <a:lstStyle/>
+          <a:p>
+            <a:pPr marL="621665" algn="l" eaLnBrk="1" latinLnBrk="0" hangingPunct="0">
+              <a:lnSpc>
+                <a:spcPct val="140000"/>
+              </a:lnSpc>
+            </a:pPr>
+            <a:r>
+              <a:rPr lang="zh-CN" altLang="zh-CN" sz="2800" b="1" i="0" u="none" dirty="0">
+                <a:solidFill>
+                  <a:srgbClr val="0000FF"/>
+                </a:solidFill>
+                <a:effectLst/>
+                <a:latin typeface="Times New Roman" pitchFamily="28"/>
+                <a:ea typeface="黑体" pitchFamily="28"/>
+              </a:rPr>
+              <a:t>答案：</a:t>
+            </a:r>
+            <a:r>
+              <a:rPr lang="zh-CN" altLang="zh-CN" sz="2800" b="0" i="0" u="none" dirty="0">
+                <a:solidFill>
+                  <a:srgbClr val="C00000"/>
+                </a:solidFill>
+                <a:effectLst/>
+                <a:latin typeface="Times New Roman" pitchFamily="28"/>
+                <a:ea typeface="宋体" pitchFamily="28"/>
+              </a:rPr>
+              <a:t>（</a:t>
+            </a:r>
+            <a:r>
+              <a:rPr lang="zh-CN" altLang="zh-CN" sz="2800" b="0" i="0" u="none" dirty="0">
+                <a:solidFill>
+                  <a:srgbClr val="C00000"/>
+                </a:solidFill>
+                <a:effectLst/>
+                <a:latin typeface="Times New Roman" pitchFamily="28"/>
+                <a:ea typeface="黑体" pitchFamily="28"/>
+              </a:rPr>
+              <a:t>1</a:t>
+            </a:r>
+            <a:r>
+              <a:rPr lang="zh-CN" altLang="zh-CN" sz="2800" b="0" i="0" u="none" dirty="0">
+                <a:solidFill>
+                  <a:srgbClr val="C00000"/>
+                </a:solidFill>
+                <a:effectLst/>
+                <a:latin typeface="Times New Roman" pitchFamily="28"/>
+                <a:ea typeface="宋体" pitchFamily="28"/>
+              </a:rPr>
+              <a:t>）</a:t>
+            </a:r>
+            <a:r>
+              <a:rPr lang="zh-CN" altLang="zh-CN" sz="2800" b="0" i="1" u="none" dirty="0">
+                <a:solidFill>
+                  <a:srgbClr val="C00000"/>
+                </a:solidFill>
+                <a:effectLst/>
+                <a:latin typeface="Times New Roman" pitchFamily="28"/>
+                <a:ea typeface="黑体" pitchFamily="28"/>
+              </a:rPr>
+              <a:t>qvB</a:t>
+            </a:r>
+            <a:r>
+              <a:rPr lang="zh-CN" altLang="zh-CN" sz="2800" b="0" i="0" u="none" dirty="0">
+                <a:solidFill>
+                  <a:srgbClr val="C00000"/>
+                </a:solidFill>
+                <a:effectLst/>
+                <a:latin typeface="Times New Roman" pitchFamily="28"/>
+                <a:ea typeface="宋体" pitchFamily="28"/>
+              </a:rPr>
+              <a:t>，方向垂直于</a:t>
+            </a:r>
+            <a:r>
+              <a:rPr lang="zh-CN" altLang="zh-CN" sz="2800" b="0" i="1" u="none" dirty="0">
+                <a:solidFill>
+                  <a:srgbClr val="C00000"/>
+                </a:solidFill>
+                <a:effectLst/>
+                <a:latin typeface="Times New Roman" pitchFamily="28"/>
+                <a:ea typeface="黑体" pitchFamily="28"/>
+              </a:rPr>
+              <a:t>v</a:t>
+            </a:r>
+            <a:r>
+              <a:rPr lang="zh-CN" altLang="zh-CN" sz="2800" b="0" i="0" u="none" dirty="0">
+                <a:solidFill>
+                  <a:srgbClr val="C00000"/>
+                </a:solidFill>
+                <a:effectLst/>
+                <a:latin typeface="Times New Roman" pitchFamily="28"/>
+                <a:ea typeface="宋体" pitchFamily="28"/>
+              </a:rPr>
+              <a:t>斜向上　</a:t>
+            </a:r>
+          </a:p>
+        </p:txBody>
+      </p:sp>
+      <p:sp>
+        <p:nvSpPr>
+          <p:cNvPr id="10489" name="yt_shape_10489"/>
+          <p:cNvSpPr txBox="1"/>
+          <p:nvPr/>
+        </p:nvSpPr>
+        <p:spPr>
+          <a:xfrm>
+            <a:off x="324000" y="5040213"/>
+            <a:ext cx="8492068" cy="532197"/>
+          </a:xfrm>
+          <a:prstGeom prst="rect">
+            <a:avLst/>
+          </a:prstGeom>
+        </p:spPr>
+        <p:txBody>
+          <a:bodyPr vert="horz" wrap="none" lIns="0" tIns="0" rIns="0" bIns="0" rtlCol="0">
+            <a:noAutofit/>
+          </a:bodyPr>
+          <a:lstStyle/>
+          <a:p>
+            <a:pPr marL="621665" algn="l" eaLnBrk="1" latinLnBrk="0" hangingPunct="0">
+              <a:lnSpc>
+                <a:spcPct val="140000"/>
+              </a:lnSpc>
+            </a:pPr>
+            <a:r>
+              <a:rPr lang="zh-CN" altLang="zh-CN" sz="2800" b="1" i="0" u="none">
+                <a:solidFill>
+                  <a:srgbClr val="0000FF"/>
+                </a:solidFill>
+                <a:effectLst/>
+                <a:latin typeface="Times New Roman" pitchFamily="28"/>
+                <a:ea typeface="黑体" pitchFamily="28"/>
+              </a:rPr>
+              <a:t>解析：</a:t>
+            </a:r>
+            <a:r>
+              <a:rPr lang="zh-CN" altLang="zh-CN" sz="2800" b="0" i="0" u="none">
+                <a:solidFill>
+                  <a:srgbClr val="C00000"/>
+                </a:solidFill>
+                <a:effectLst/>
+                <a:latin typeface="Times New Roman" pitchFamily="28"/>
+                <a:ea typeface="仿宋" pitchFamily="28"/>
+              </a:rPr>
+              <a:t>因</a:t>
+            </a:r>
+            <a:r>
+              <a:rPr lang="zh-CN" altLang="zh-CN" sz="2800" b="0" i="1" u="none">
+                <a:solidFill>
+                  <a:srgbClr val="C00000"/>
+                </a:solidFill>
+                <a:effectLst/>
+                <a:latin typeface="Times New Roman" pitchFamily="28"/>
+                <a:ea typeface="黑体" pitchFamily="28"/>
+              </a:rPr>
+              <a:t>v</a:t>
+            </a:r>
+            <a:r>
+              <a:rPr lang="zh-CN" altLang="zh-CN" sz="2800" b="0" i="0" u="none">
+                <a:solidFill>
+                  <a:srgbClr val="C00000"/>
+                </a:solidFill>
+                <a:effectLst/>
+                <a:latin typeface="Times New Roman" pitchFamily="28"/>
+                <a:ea typeface="仿宋" pitchFamily="28"/>
+              </a:rPr>
+              <a:t>⊥</a:t>
+            </a:r>
+            <a:r>
+              <a:rPr lang="zh-CN" altLang="zh-CN" sz="2800" b="0" i="1" u="none">
+                <a:solidFill>
+                  <a:srgbClr val="C00000"/>
+                </a:solidFill>
+                <a:effectLst/>
+                <a:latin typeface="Times New Roman" pitchFamily="28"/>
+                <a:ea typeface="黑体" pitchFamily="28"/>
+              </a:rPr>
+              <a:t>B</a:t>
+            </a:r>
+            <a:r>
+              <a:rPr lang="zh-CN" altLang="zh-CN" sz="2800" b="0" i="0" u="none">
+                <a:solidFill>
+                  <a:srgbClr val="C00000"/>
+                </a:solidFill>
+                <a:effectLst/>
+                <a:latin typeface="Times New Roman" pitchFamily="28"/>
+                <a:ea typeface="仿宋" pitchFamily="28"/>
+              </a:rPr>
+              <a:t>，所以</a:t>
+            </a:r>
+            <a:r>
+              <a:rPr lang="zh-CN" altLang="zh-CN" sz="2800" b="0" i="1" u="none">
+                <a:solidFill>
+                  <a:srgbClr val="C00000"/>
+                </a:solidFill>
+                <a:effectLst/>
+                <a:latin typeface="Times New Roman" pitchFamily="28"/>
+                <a:ea typeface="黑体" pitchFamily="28"/>
+              </a:rPr>
+              <a:t>F</a:t>
+            </a:r>
+            <a:r>
+              <a:rPr lang="zh-CN" altLang="zh-CN" sz="2800" b="0" i="0" u="none">
+                <a:solidFill>
+                  <a:srgbClr val="C00000"/>
+                </a:solidFill>
+                <a:effectLst/>
+                <a:latin typeface="Times New Roman" pitchFamily="28"/>
+                <a:ea typeface="仿宋" pitchFamily="28"/>
+              </a:rPr>
+              <a:t>=</a:t>
+            </a:r>
+            <a:r>
+              <a:rPr lang="zh-CN" altLang="zh-CN" sz="2800" b="0" i="1" u="none">
+                <a:solidFill>
+                  <a:srgbClr val="C00000"/>
+                </a:solidFill>
+                <a:effectLst/>
+                <a:latin typeface="Times New Roman" pitchFamily="28"/>
+                <a:ea typeface="黑体" pitchFamily="28"/>
+              </a:rPr>
+              <a:t>qvB</a:t>
+            </a:r>
+            <a:r>
+              <a:rPr lang="zh-CN" altLang="zh-CN" sz="2800" b="0" i="0" u="none">
+                <a:solidFill>
+                  <a:srgbClr val="C00000"/>
+                </a:solidFill>
+                <a:effectLst/>
+                <a:latin typeface="Times New Roman" pitchFamily="28"/>
+                <a:ea typeface="仿宋" pitchFamily="28"/>
+              </a:rPr>
+              <a:t>，方向垂直于</a:t>
+            </a:r>
+            <a:r>
+              <a:rPr lang="zh-CN" altLang="zh-CN" sz="2800" b="0" i="1" u="none">
+                <a:solidFill>
+                  <a:srgbClr val="C00000"/>
+                </a:solidFill>
+                <a:effectLst/>
+                <a:latin typeface="Times New Roman" pitchFamily="28"/>
+                <a:ea typeface="黑体" pitchFamily="28"/>
+              </a:rPr>
+              <a:t>v</a:t>
+            </a:r>
+            <a:r>
+              <a:rPr lang="zh-CN" altLang="zh-CN" sz="2800" b="0" i="0" u="none">
+                <a:solidFill>
+                  <a:srgbClr val="C00000"/>
+                </a:solidFill>
+                <a:effectLst/>
+                <a:latin typeface="Times New Roman" pitchFamily="28"/>
+                <a:ea typeface="仿宋" pitchFamily="28"/>
+              </a:rPr>
+              <a:t>斜向上。</a:t>
+            </a:r>
+          </a:p>
+        </p:txBody>
+      </p:sp>
+      <p:sp>
+        <p:nvSpPr>
+          <p:cNvPr id="10490" name="yt_shape_10490"/>
+          <p:cNvSpPr txBox="1"/>
+          <p:nvPr/>
+        </p:nvSpPr>
+        <p:spPr>
+          <a:xfrm>
+            <a:off x="324000" y="5623198"/>
+            <a:ext cx="7563930" cy="532197"/>
+          </a:xfrm>
+          <a:prstGeom prst="rect">
+            <a:avLst/>
+          </a:prstGeom>
+        </p:spPr>
+        <p:txBody>
+          <a:bodyPr vert="horz" wrap="none" lIns="0" tIns="0" rIns="0" bIns="0" rtlCol="0">
+            <a:noAutofit/>
+          </a:bodyPr>
+          <a:lstStyle/>
+          <a:p>
+            <a:pPr marL="621665" algn="l" eaLnBrk="1" latinLnBrk="0" hangingPunct="0">
+              <a:lnSpc>
+                <a:spcPct val="140000"/>
+              </a:lnSpc>
+            </a:pPr>
+            <a:r>
+              <a:rPr lang="zh-CN" altLang="zh-CN" sz="2800" b="1" i="0" u="none">
+                <a:solidFill>
+                  <a:srgbClr val="0000FF"/>
+                </a:solidFill>
+                <a:effectLst/>
+                <a:latin typeface="Times New Roman" pitchFamily="28"/>
+                <a:ea typeface="黑体" pitchFamily="28"/>
+              </a:rPr>
+              <a:t>答案：</a:t>
+            </a:r>
+            <a:r>
+              <a:rPr lang="zh-CN" altLang="zh-CN" sz="2800" b="0" i="0" u="none">
+                <a:solidFill>
+                  <a:srgbClr val="C00000"/>
+                </a:solidFill>
+                <a:effectLst/>
+                <a:latin typeface="Times New Roman" pitchFamily="28"/>
+                <a:ea typeface="宋体" pitchFamily="28"/>
+              </a:rPr>
+              <a:t>（</a:t>
+            </a:r>
+            <a:r>
+              <a:rPr lang="zh-CN" altLang="zh-CN" sz="2800" b="0" i="0" u="none">
+                <a:solidFill>
+                  <a:srgbClr val="C00000"/>
+                </a:solidFill>
+                <a:effectLst/>
+                <a:latin typeface="Times New Roman" pitchFamily="28"/>
+                <a:ea typeface="黑体" pitchFamily="28"/>
+              </a:rPr>
+              <a:t>2</a:t>
+            </a:r>
+            <a:r>
+              <a:rPr lang="zh-CN" altLang="zh-CN" sz="2800" b="0" i="0" u="none">
+                <a:solidFill>
+                  <a:srgbClr val="C00000"/>
+                </a:solidFill>
+                <a:effectLst/>
+                <a:latin typeface="Times New Roman" pitchFamily="28"/>
+                <a:ea typeface="宋体" pitchFamily="28"/>
+              </a:rPr>
+              <a:t>）</a:t>
+            </a:r>
+            <a:r>
+              <a:rPr lang="zh-CN" altLang="zh-CN" sz="2800" b="0" i="0" u="none">
+                <a:solidFill>
+                  <a:srgbClr val="C00000"/>
+                </a:solidFill>
+                <a:effectLst/>
+                <a:latin typeface="Times New Roman" pitchFamily="28"/>
+                <a:ea typeface="黑体" pitchFamily="28"/>
+              </a:rPr>
+              <a:t>0</a:t>
+            </a:r>
+            <a:r>
+              <a:rPr lang="zh-CN" altLang="zh-CN" sz="2800" b="0" i="0" u="none">
+                <a:solidFill>
+                  <a:srgbClr val="C00000"/>
+                </a:solidFill>
+                <a:effectLst/>
+                <a:latin typeface="Times New Roman" pitchFamily="28"/>
+                <a:ea typeface="宋体" pitchFamily="28"/>
+              </a:rPr>
+              <a:t>.</a:t>
+            </a:r>
+            <a:r>
+              <a:rPr lang="zh-CN" altLang="zh-CN" sz="2800" b="0" i="0" u="none">
+                <a:solidFill>
+                  <a:srgbClr val="C00000"/>
+                </a:solidFill>
+                <a:effectLst/>
+                <a:latin typeface="Times New Roman" pitchFamily="28"/>
+                <a:ea typeface="黑体" pitchFamily="28"/>
+              </a:rPr>
+              <a:t>5</a:t>
+            </a:r>
+            <a:r>
+              <a:rPr lang="zh-CN" altLang="zh-CN" sz="2800" b="0" i="1" u="none">
+                <a:solidFill>
+                  <a:srgbClr val="C00000"/>
+                </a:solidFill>
+                <a:effectLst/>
+                <a:latin typeface="Times New Roman" pitchFamily="28"/>
+                <a:ea typeface="黑体" pitchFamily="28"/>
+              </a:rPr>
+              <a:t>qvB</a:t>
+            </a:r>
+            <a:r>
+              <a:rPr lang="zh-CN" altLang="zh-CN" sz="2800" b="0" i="0" u="none">
+                <a:solidFill>
+                  <a:srgbClr val="C00000"/>
+                </a:solidFill>
+                <a:effectLst/>
+                <a:latin typeface="Times New Roman" pitchFamily="28"/>
+                <a:ea typeface="宋体" pitchFamily="28"/>
+              </a:rPr>
+              <a:t>，方向垂直于纸面向里　</a:t>
+            </a:r>
+          </a:p>
+        </p:txBody>
+      </p:sp>
+    </p:spTree>
+  </p:cSld>
+  <p:clrMapOvr>
+    <a:masterClrMapping/>
+  </p:clrMapOvr>
+  <p:timing>
+    <p:tnLst>
+      <p:par>
+        <p:cTn id="1" dur="indefinite" restart="never" nodeType="tmRoot">
+          <p:childTnLst>
+            <p:seq concurrent="1" nextAc="seek">
+              <p:cTn id="2" dur="indefinite" nodeType="mainSeq">
+                <p:childTnLst>
+                  <p:par>
+                    <p:cTn id="3" fill="hold">
+                      <p:stCondLst>
+                        <p:cond delay="indefinite"/>
+                      </p:stCondLst>
+                      <p:childTnLst>
+                        <p:par>
+                          <p:cTn id="4" fill="hold">
+                            <p:stCondLst>
+                              <p:cond delay="0"/>
+                            </p:stCondLst>
+                            <p:childTnLst>
+                              <p:par>
+                                <p:cTn id="5" presetID="3" presetClass="entr" presetSubtype="10" fill="hold" grpId="0" nodeType="clickEffect">
+                                  <p:stCondLst>
+                                    <p:cond delay="0"/>
+                                  </p:stCondLst>
+                                  <p:childTnLst>
+                                    <p:set>
+                                      <p:cBhvr>
+                                        <p:cTn id="6" dur="1" fill="hold">
+                                          <p:stCondLst>
+                                            <p:cond delay="0"/>
+                                          </p:stCondLst>
+                                        </p:cTn>
+                                        <p:tgtEl>
+                                          <p:spTgt spid="10488">
+                                            <p:txEl>
+                                              <p:pRg st="0" end="0"/>
+                                            </p:txEl>
+                                          </p:spTgt>
+                                        </p:tgtEl>
+                                        <p:attrNameLst>
+                                          <p:attrName>style.visibility</p:attrName>
+                                        </p:attrNameLst>
+                                      </p:cBhvr>
+                                      <p:to>
+                                        <p:strVal val="visible"/>
+                                      </p:to>
+                                    </p:set>
+                                    <p:animEffect transition="in" filter="blinds(horizontal)">
+                                      <p:cBhvr>
+                                        <p:cTn id="7" dur="500"/>
+                                        <p:tgtEl>
+                                          <p:spTgt spid="10488">
+                                            <p:txEl>
+                                              <p:pRg st="0" end="0"/>
+                                            </p:txEl>
+                                          </p:spTgt>
+                                        </p:tgtEl>
+                                      </p:cBhvr>
+                                    </p:animEffect>
+                                  </p:childTnLst>
+                                </p:cTn>
+                              </p:par>
+                            </p:childTnLst>
+                          </p:cTn>
+                        </p:par>
+                      </p:childTnLst>
+                    </p:cTn>
+                  </p:par>
+                  <p:par>
+                    <p:cTn id="8" fill="hold">
+                      <p:stCondLst>
+                        <p:cond delay="indefinite"/>
+                      </p:stCondLst>
+                      <p:childTnLst>
+                        <p:par>
+                          <p:cTn id="9" fill="hold">
+                            <p:stCondLst>
+                              <p:cond delay="0"/>
+                            </p:stCondLst>
+                            <p:childTnLst>
+                              <p:par>
+                                <p:cTn id="10" presetID="3" presetClass="entr" presetSubtype="10" fill="hold" grpId="0" nodeType="clickEffect">
+                                  <p:stCondLst>
+                                    <p:cond delay="0"/>
+                                  </p:stCondLst>
+                                  <p:childTnLst>
+                                    <p:set>
+                                      <p:cBhvr>
+                                        <p:cTn id="11" dur="1" fill="hold">
+                                          <p:stCondLst>
+                                            <p:cond delay="0"/>
+                                          </p:stCondLst>
+                                        </p:cTn>
+                                        <p:tgtEl>
+                                          <p:spTgt spid="10489">
+                                            <p:txEl>
+                                              <p:pRg st="0" end="0"/>
+                                            </p:txEl>
+                                          </p:spTgt>
+                                        </p:tgtEl>
+                                        <p:attrNameLst>
+                                          <p:attrName>style.visibility</p:attrName>
+                                        </p:attrNameLst>
+                                      </p:cBhvr>
+                                      <p:to>
+                                        <p:strVal val="visible"/>
+                                      </p:to>
+                                    </p:set>
+                                    <p:animEffect transition="in" filter="blinds(horizontal)">
+                                      <p:cBhvr>
+                                        <p:cTn id="12" dur="500"/>
+                                        <p:tgtEl>
+                                          <p:spTgt spid="10489">
+                                            <p:txEl>
+                                              <p:pRg st="0" end="0"/>
+                                            </p:txEl>
+                                          </p:spTgt>
+                                        </p:tgtEl>
+                                      </p:cBhvr>
+                                    </p:animEffect>
+                                  </p:childTnLst>
+                                </p:cTn>
+                              </p:par>
+                            </p:childTnLst>
+                          </p:cTn>
+                        </p:par>
+                      </p:childTnLst>
+                    </p:cTn>
+                  </p:par>
+                  <p:par>
+                    <p:cTn id="13" fill="hold">
+                      <p:stCondLst>
+                        <p:cond delay="indefinite"/>
+                      </p:stCondLst>
+                      <p:childTnLst>
+                        <p:par>
+                          <p:cTn id="14" fill="hold">
+                            <p:stCondLst>
+                              <p:cond delay="0"/>
+                            </p:stCondLst>
+                            <p:childTnLst>
+                              <p:par>
+                                <p:cTn id="15" presetID="3" presetClass="entr" presetSubtype="10" fill="hold" grpId="0" nodeType="clickEffect">
+                                  <p:stCondLst>
+                                    <p:cond delay="0"/>
+                                  </p:stCondLst>
+                                  <p:childTnLst>
+                                    <p:set>
+                                      <p:cBhvr>
+                                        <p:cTn id="16" dur="1" fill="hold">
+                                          <p:stCondLst>
+                                            <p:cond delay="0"/>
+                                          </p:stCondLst>
+                                        </p:cTn>
+                                        <p:tgtEl>
+                                          <p:spTgt spid="10490">
+                                            <p:txEl>
+                                              <p:pRg st="0" end="0"/>
+                                            </p:txEl>
+                                          </p:spTgt>
+                                        </p:tgtEl>
+                                        <p:attrNameLst>
+                                          <p:attrName>style.visibility</p:attrName>
+                                        </p:attrNameLst>
+                                      </p:cBhvr>
+                                      <p:to>
+                                        <p:strVal val="visible"/>
+                                      </p:to>
+                                    </p:set>
+                                    <p:animEffect transition="in" filter="blinds(horizontal)">
+                                      <p:cBhvr>
+                                        <p:cTn id="17" dur="500"/>
+                                        <p:tgtEl>
+                                          <p:spTgt spid="10490">
+                                            <p:txEl>
+                                              <p:pRg st="0" end="0"/>
+                                            </p:txEl>
+                                          </p:spTgt>
+                                        </p:tgtEl>
+                                      </p:cBhvr>
+                                    </p:animEffect>
+                                  </p:childTnLst>
+                                </p:cTn>
+                              </p:par>
+                            </p:childTnLst>
+                          </p:cTn>
+                        </p:par>
+                      </p:childTnLst>
+                    </p:cTn>
+                  </p:par>
+                </p:childTnLst>
+              </p:cTn>
+              <p:prevCondLst>
+                <p:cond evt="onPrev" delay="0">
+                  <p:tgtEl>
+                    <p:sldTgt/>
+                  </p:tgtEl>
+                </p:cond>
+              </p:prevCondLst>
+              <p:nextCondLst>
+                <p:cond evt="onNext" delay="0">
+                  <p:tgtEl>
+                    <p:sldTgt/>
+                  </p:tgtEl>
+                </p:cond>
+              </p:nextCondLst>
+            </p:seq>
+          </p:childTnLst>
+        </p:cTn>
+      </p:par>
+    </p:tnLst>
+    <p:bldLst>
+      <p:bldP spid="10488" grpId="0" build="allAtOnce"/>
+      <p:bldP spid="10489" grpId="0" build="allAtOnce"/>
+      <p:bldP spid="10490" grpId="0" build="allAtOnce"/>
+    </p:bldLst>
+  </p:timing>
+</p:sld>
+</file>
+
+<file path=ppt/slides/slide15.xml><?xml version="1.0" encoding="utf-8"?>
+<p:sld xmlns:a="http://schemas.openxmlformats.org/drawingml/2006/main" xmlns:r="http://schemas.openxmlformats.org/officeDocument/2006/relationships" xmlns:p="http://schemas.openxmlformats.org/presentationml/2006/main">
+  <p:cSld>
+    <p:spTree>
+      <p:nvGrpSpPr>
+        <p:cNvPr id="1" name="YT"/>
+        <p:cNvGrpSpPr/>
+        <p:nvPr/>
+      </p:nvGrpSpPr>
+      <p:grpSpPr>
+        <a:xfrm>
+          <a:off x="0" y="0"/>
+          <a:ext cx="0" cy="0"/>
+          <a:chOff x="0" y="0"/>
+          <a:chExt cx="0" cy="0"/>
+        </a:xfrm>
+      </p:grpSpPr>
+      <p:sp>
+        <p:nvSpPr>
+          <p:cNvPr id="10521" name="yt_shape_10521"/>
+          <p:cNvSpPr txBox="1"/>
+          <p:nvPr/>
+        </p:nvSpPr>
+        <p:spPr>
+          <a:xfrm>
+            <a:off x="324071" y="467999"/>
+            <a:ext cx="11924914" cy="2945165"/>
+          </a:xfrm>
+          <a:prstGeom prst="rect">
+            <a:avLst/>
+          </a:prstGeom>
+        </p:spPr>
+        <p:txBody>
+          <a:bodyPr vert="horz" wrap="square" lIns="0" tIns="0" rIns="0" bIns="0" rtlCol="0">
+            <a:noAutofit/>
+          </a:bodyPr>
+          <a:lstStyle/>
+          <a:p>
+            <a:pPr marL="354965" algn="l" eaLnBrk="1" latinLnBrk="0" hangingPunct="0">
+              <a:lnSpc>
+                <a:spcPct val="140000"/>
+              </a:lnSpc>
+            </a:pPr>
+            <a:r>
+              <a:rPr lang="zh-CN" altLang="zh-CN" sz="2800" b="1" i="0" u="none">
+                <a:solidFill>
+                  <a:srgbClr val="000000"/>
+                </a:solidFill>
+                <a:effectLst/>
+                <a:latin typeface="Times New Roman" pitchFamily="28"/>
+                <a:ea typeface="黑体" pitchFamily="28"/>
+              </a:rPr>
+              <a:t>【例 </a:t>
+            </a:r>
+            <a:r>
+              <a:rPr lang="zh-CN" altLang="zh-CN" sz="2800" b="0" i="0" u="none">
+                <a:solidFill>
+                  <a:srgbClr val="000000"/>
+                </a:solidFill>
+                <a:effectLst/>
+                <a:latin typeface="Times New Roman" pitchFamily="28"/>
+                <a:ea typeface="黑体" pitchFamily="28"/>
+              </a:rPr>
+              <a:t>3</a:t>
+            </a:r>
+            <a:r>
+              <a:rPr lang="zh-CN" altLang="zh-CN" sz="2800" b="1" i="0" u="none">
+                <a:solidFill>
+                  <a:srgbClr val="000000"/>
+                </a:solidFill>
+                <a:effectLst/>
+                <a:latin typeface="Times New Roman" pitchFamily="28"/>
+                <a:ea typeface="黑体" pitchFamily="28"/>
+              </a:rPr>
+              <a:t>】</a:t>
+            </a:r>
+            <a:r>
+              <a:rPr lang="zh-CN" altLang="zh-CN" sz="2800" b="0" i="0" u="none">
+                <a:solidFill>
+                  <a:srgbClr val="000000"/>
+                </a:solidFill>
+                <a:effectLst/>
+                <a:latin typeface="Times New Roman" pitchFamily="28"/>
+                <a:ea typeface="宋体" pitchFamily="28"/>
+                <a:sym typeface="_⨹_28_5062d"/>
+              </a:rPr>
+              <a:t> 显像管原理的示意图如图所示，当没有磁场时，电子束将打在</a:t>
+            </a:r>
+            <a:br>
+              <a:rPr lang="zh-CN" altLang="zh-CN" sz="2800" b="0" i="0" u="none">
+                <a:solidFill>
+                  <a:srgbClr val="000000"/>
+                </a:solidFill>
+                <a:effectLst/>
+                <a:latin typeface="Times New Roman" pitchFamily="28"/>
+                <a:ea typeface="宋体" pitchFamily="28"/>
+              </a:rPr>
+            </a:br>
+            <a:r>
+              <a:rPr lang="zh-CN" altLang="zh-CN" sz="2800" b="0" i="0" u="none">
+                <a:solidFill>
+                  <a:srgbClr val="000000"/>
+                </a:solidFill>
+                <a:effectLst/>
+                <a:latin typeface="Times New Roman" pitchFamily="28"/>
+                <a:ea typeface="宋体" pitchFamily="28"/>
+              </a:rPr>
+              <a:t>荧光屏正中的</a:t>
+            </a:r>
+            <a:r>
+              <a:rPr lang="zh-CN" altLang="zh-CN" sz="2800" b="0" i="1" u="none">
+                <a:solidFill>
+                  <a:srgbClr val="000000"/>
+                </a:solidFill>
+                <a:effectLst/>
+                <a:latin typeface="Times New Roman" pitchFamily="28"/>
+                <a:ea typeface="宋体" pitchFamily="28"/>
+              </a:rPr>
+              <a:t>O</a:t>
+            </a:r>
+            <a:r>
+              <a:rPr lang="zh-CN" altLang="zh-CN" sz="2800" b="0" i="0" u="none">
+                <a:solidFill>
+                  <a:srgbClr val="000000"/>
+                </a:solidFill>
+                <a:effectLst/>
+                <a:latin typeface="Times New Roman" pitchFamily="28"/>
+                <a:ea typeface="宋体" pitchFamily="28"/>
+                <a:sym typeface="_⨹_24_5b519"/>
+              </a:rPr>
+              <a:t>点，安装在管径上的偏转线圈可以产生磁场，使电子束</a:t>
+            </a:r>
+            <a:br>
+              <a:rPr lang="zh-CN" altLang="zh-CN" sz="2800" b="0" i="0" u="none">
+                <a:solidFill>
+                  <a:srgbClr val="000000"/>
+                </a:solidFill>
+                <a:effectLst/>
+                <a:latin typeface="Times New Roman" pitchFamily="28"/>
+                <a:ea typeface="宋体" pitchFamily="28"/>
+              </a:rPr>
+            </a:br>
+            <a:r>
+              <a:rPr lang="zh-CN" altLang="zh-CN" sz="2800" b="0" i="0" u="none">
+                <a:solidFill>
+                  <a:srgbClr val="000000"/>
+                </a:solidFill>
+                <a:effectLst/>
+                <a:latin typeface="Times New Roman" pitchFamily="28"/>
+                <a:ea typeface="宋体" pitchFamily="28"/>
+                <a:sym typeface="_⨹_31_fc4f8"/>
+              </a:rPr>
+              <a:t>发生偏转。设垂直纸面向里的磁场方向为正方向，若要使电子打在荧光</a:t>
+            </a:r>
+            <a:br>
+              <a:rPr lang="zh-CN" altLang="zh-CN" sz="2800" b="0" i="0" u="none">
+                <a:solidFill>
+                  <a:srgbClr val="000000"/>
+                </a:solidFill>
+                <a:effectLst/>
+                <a:latin typeface="Times New Roman" pitchFamily="28"/>
+                <a:ea typeface="宋体" pitchFamily="28"/>
+              </a:rPr>
+            </a:br>
+            <a:r>
+              <a:rPr lang="zh-CN" altLang="zh-CN" sz="2800" b="0" i="0" u="none">
+                <a:solidFill>
+                  <a:srgbClr val="000000"/>
+                </a:solidFill>
+                <a:effectLst/>
+                <a:latin typeface="Times New Roman" pitchFamily="28"/>
+                <a:ea typeface="宋体" pitchFamily="28"/>
+              </a:rPr>
+              <a:t>屏上的位置由</a:t>
+            </a:r>
+            <a:r>
+              <a:rPr lang="zh-CN" altLang="zh-CN" sz="2800" b="0" i="1" u="none">
+                <a:solidFill>
+                  <a:srgbClr val="000000"/>
+                </a:solidFill>
+                <a:effectLst/>
+                <a:latin typeface="Times New Roman" pitchFamily="28"/>
+                <a:ea typeface="宋体" pitchFamily="28"/>
+              </a:rPr>
+              <a:t>a</a:t>
+            </a:r>
+            <a:r>
+              <a:rPr lang="zh-CN" altLang="zh-CN" sz="2800" b="0" i="0" u="none">
+                <a:solidFill>
+                  <a:srgbClr val="000000"/>
+                </a:solidFill>
+                <a:effectLst/>
+                <a:latin typeface="Times New Roman" pitchFamily="28"/>
+                <a:ea typeface="宋体" pitchFamily="28"/>
+              </a:rPr>
+              <a:t>点逐渐移动到</a:t>
+            </a:r>
+            <a:r>
+              <a:rPr lang="zh-CN" altLang="zh-CN" sz="2800" b="0" i="1" u="none">
+                <a:solidFill>
+                  <a:srgbClr val="000000"/>
+                </a:solidFill>
+                <a:effectLst/>
+                <a:latin typeface="Times New Roman" pitchFamily="28"/>
+                <a:ea typeface="宋体" pitchFamily="28"/>
+              </a:rPr>
+              <a:t>b</a:t>
+            </a:r>
+            <a:r>
+              <a:rPr lang="zh-CN" altLang="zh-CN" sz="2800" b="0" i="0" u="none">
+                <a:solidFill>
+                  <a:srgbClr val="000000"/>
+                </a:solidFill>
+                <a:effectLst/>
+                <a:latin typeface="Times New Roman" pitchFamily="28"/>
+                <a:ea typeface="宋体" pitchFamily="28"/>
+                <a:sym typeface="_⨹_18_b3fbd"/>
+              </a:rPr>
+              <a:t>点，下列变化的磁场能够使电子发生上述</a:t>
+            </a:r>
+            <a:br>
+              <a:rPr lang="zh-CN" altLang="zh-CN" sz="2800" b="0" i="0" u="none">
+                <a:solidFill>
+                  <a:srgbClr val="000000"/>
+                </a:solidFill>
+                <a:effectLst/>
+                <a:latin typeface="Times New Roman" pitchFamily="28"/>
+                <a:ea typeface="宋体" pitchFamily="28"/>
+              </a:rPr>
+            </a:br>
+            <a:r>
+              <a:rPr lang="zh-CN" altLang="zh-CN" sz="2800" b="0" i="0" u="none">
+                <a:solidFill>
+                  <a:srgbClr val="000000"/>
+                </a:solidFill>
+                <a:effectLst/>
+                <a:latin typeface="Times New Roman" pitchFamily="28"/>
+                <a:ea typeface="宋体" pitchFamily="28"/>
+              </a:rPr>
+              <a:t>偏转的是（　　）</a:t>
+            </a:r>
+          </a:p>
+        </p:txBody>
+      </p:sp>
+      <p:pic>
+        <p:nvPicPr>
+          <p:cNvPr id="10522" name="yt_image_10522" title="H_188.06401">
+            <a:extLst>
+              <a:ext uri="">
+                <a16:creationId xmlns:a16="http://schemas.microsoft.com/office/drawing/2014/main" xmlns:p15="http://schemas.microsoft.com/office/powerpoint/2012/main" xmlns:mc="http://schemas.openxmlformats.org/markup-compatibility/2006" xmlns:a14="http://schemas.microsoft.com/office/drawing/2010/main" xmlns="" id="{5351258F-BC95-41E6-9372-C2FE361B0291}"/>
+              </a:ext>
+            </a:extLst>
+          </p:cNvPr>
+          <p:cNvPicPr>
+            <a:picLocks noChangeAspect="1" noChangeArrowheads="1"/>
+          </p:cNvPicPr>
+          <p:nvPr/>
+        </p:nvPicPr>
+        <p:blipFill>
+          <a:blip r:embed="rId2" cstate="print">
+            <a:extLst>
+              <a:ext uri="{28A0092B-C50C-407E-A947-70E740481C1C}">
+                <a14:useLocalDpi xmlns:a14="http://schemas.microsoft.com/office/drawing/2010/main" val="0"/>
+              </a:ext>
+            </a:extLst>
+          </a:blip>
+          <a:srcRect/>
+          <a:stretch>
+            <a:fillRect/>
+          </a:stretch>
+        </p:blipFill>
+        <p:spPr bwMode="auto">
+          <a:xfrm>
+            <a:off x="7466786" y="3413164"/>
+            <a:ext cx="4319626" cy="2388413"/>
+          </a:xfrm>
+          <a:prstGeom prst="rect">
+            <a:avLst/>
+          </a:prstGeom>
+          <a:noFill/>
+          <a:extLst>
+            <a:ext uri="{909E8E84-426E-40DD-AFC4-6F175D3DCCD1}">
+              <a14:hiddenFill xmlns:a14="http://schemas.microsoft.com/office/drawing/2010/main">
+                <a:solidFill>
+                  <a:srgbClr val="FFFFFF"/>
+                </a:solidFill>
+              </a14:hiddenFill>
+            </a:ext>
+          </a:extLst>
+        </p:spPr>
+      </p:pic>
+      <p:pic>
+        <p:nvPicPr>
+          <p:cNvPr id="4" name="yt_image_10524" title="H_120.095985">
+            <a:extLst>
+              <a:ext uri="">
+                <a16:creationId xmlns:a16="http://schemas.microsoft.com/office/drawing/2014/main" xmlns:p15="http://schemas.microsoft.com/office/powerpoint/2012/main" xmlns:mc="http://schemas.openxmlformats.org/markup-compatibility/2006" xmlns:a14="http://schemas.microsoft.com/office/drawing/2010/main" xmlns="" id="{5351258F-BC95-41E6-9372-C2FE361B0291}"/>
+              </a:ext>
+            </a:extLst>
+          </p:cNvPr>
+          <p:cNvPicPr>
+            <a:picLocks noChangeAspect="1" noChangeArrowheads="1"/>
+          </p:cNvPicPr>
+          <p:nvPr/>
+        </p:nvPicPr>
+        <p:blipFill>
+          <a:blip r:embed="rId3" cstate="print">
+            <a:extLst>
+              <a:ext uri="{28A0092B-C50C-407E-A947-70E740481C1C}">
+                <a14:useLocalDpi xmlns:a14="http://schemas.microsoft.com/office/drawing/2010/main" val="0"/>
+              </a:ext>
+            </a:extLst>
+          </a:blip>
+          <a:srcRect/>
+          <a:stretch>
+            <a:fillRect/>
+          </a:stretch>
+        </p:blipFill>
+        <p:spPr bwMode="auto">
+          <a:xfrm>
+            <a:off x="747064" y="3389000"/>
+            <a:ext cx="5615636" cy="1415792"/>
+          </a:xfrm>
+          <a:prstGeom prst="rect">
+            <a:avLst/>
+          </a:prstGeom>
+          <a:noFill/>
+          <a:extLst>
+            <a:ext uri="{909E8E84-426E-40DD-AFC4-6F175D3DCCD1}">
+              <a14:hiddenFill xmlns:a14="http://schemas.microsoft.com/office/drawing/2010/main">
+                <a:solidFill>
+                  <a:srgbClr val="FFFFFF"/>
+                </a:solidFill>
+              </a14:hiddenFill>
+            </a:ext>
+          </a:extLst>
+        </p:spPr>
+      </p:pic>
+      <p:pic>
+        <p:nvPicPr>
+          <p:cNvPr id="5" name="yt_image_10526" title="H_118.65598">
+            <a:extLst>
+              <a:ext uri="">
+                <a16:creationId xmlns:a16="http://schemas.microsoft.com/office/drawing/2014/main" xmlns:p15="http://schemas.microsoft.com/office/powerpoint/2012/main" xmlns:mc="http://schemas.openxmlformats.org/markup-compatibility/2006" xmlns:a14="http://schemas.microsoft.com/office/drawing/2010/main" xmlns="" id="{5351258F-BC95-41E6-9372-C2FE361B0291}"/>
+              </a:ext>
+            </a:extLst>
+          </p:cNvPr>
+          <p:cNvPicPr>
+            <a:picLocks noChangeAspect="1" noChangeArrowheads="1"/>
+          </p:cNvPicPr>
+          <p:nvPr/>
+        </p:nvPicPr>
+        <p:blipFill>
+          <a:blip r:embed="rId4" cstate="print">
+            <a:extLst>
+              <a:ext uri="{28A0092B-C50C-407E-A947-70E740481C1C}">
+                <a14:useLocalDpi xmlns:a14="http://schemas.microsoft.com/office/drawing/2010/main" val="0"/>
+              </a:ext>
+            </a:extLst>
+          </a:blip>
+          <a:srcRect/>
+          <a:stretch>
+            <a:fillRect/>
+          </a:stretch>
+        </p:blipFill>
+        <p:spPr bwMode="auto">
+          <a:xfrm>
+            <a:off x="747064" y="5117034"/>
+            <a:ext cx="5615636" cy="1398816"/>
+          </a:xfrm>
+          <a:prstGeom prst="rect">
+            <a:avLst/>
+          </a:prstGeom>
+          <a:noFill/>
+          <a:extLst>
+            <a:ext uri="{909E8E84-426E-40DD-AFC4-6F175D3DCCD1}">
+              <a14:hiddenFill xmlns:a14="http://schemas.microsoft.com/office/drawing/2010/main">
+                <a:solidFill>
+                  <a:srgbClr val="FFFFFF"/>
+                </a:solidFill>
+              </a14:hiddenFill>
+            </a:ext>
+          </a:extLst>
+        </p:spPr>
+      </p:pic>
+      <p:sp>
+        <p:nvSpPr>
+          <p:cNvPr id="6" name="矩形 5"/>
+          <p:cNvSpPr/>
+          <p:nvPr/>
+        </p:nvSpPr>
+        <p:spPr>
+          <a:xfrm>
+            <a:off x="1705110" y="4302789"/>
+            <a:ext cx="761669" cy="784830"/>
+          </a:xfrm>
+          <a:prstGeom prst="rect">
+            <a:avLst/>
+          </a:prstGeom>
+        </p:spPr>
+        <p:txBody>
+          <a:bodyPr wrap="square">
+            <a:spAutoFit/>
+          </a:bodyPr>
+          <a:lstStyle/>
+          <a:p>
+            <a:r>
+              <a:rPr lang="en-US" altLang="zh-CN" sz="4500" b="1" dirty="0">
+                <a:solidFill>
+                  <a:srgbClr val="C00000"/>
+                </a:solidFill>
+                <a:latin typeface="华文细黑" panose="02010600040101010101" pitchFamily="2" charset="-122"/>
+                <a:ea typeface="华文细黑" panose="02010600040101010101" pitchFamily="2" charset="-122"/>
+              </a:rPr>
+              <a:t>√</a:t>
+            </a:r>
+            <a:endParaRPr lang="zh-CN" altLang="en-US" sz="4500" b="1" dirty="0">
+              <a:solidFill>
+                <a:srgbClr val="C00000"/>
+              </a:solidFill>
+              <a:latin typeface="华文细黑" panose="02010600040101010101" pitchFamily="2" charset="-122"/>
+              <a:ea typeface="华文细黑" panose="02010600040101010101" pitchFamily="2" charset="-122"/>
+            </a:endParaRPr>
+          </a:p>
+        </p:txBody>
+      </p:sp>
+    </p:spTree>
+  </p:cSld>
+  <p:clrMapOvr>
+    <a:masterClrMapping/>
+  </p:clrMapOvr>
+  <mc:AlternateContent xmlns:mc="http://schemas.openxmlformats.org/markup-compatibility/2006" xmlns:p15="http://schemas.microsoft.com/office/powerpoint/2012/main">
+    <mc:Choice Requires="p15">
+      <p:transition spd="med">
+        <p15:prstTrans prst="pageCurlDouble"/>
+      </p:transition>
+    </mc:Choice>
+    <mc:Fallback xmlns:a14="http://schemas.microsoft.com/office/drawing/2010/main" xmlns:a16="http://schemas.microsoft.com/office/drawing/2014/main" xmlns="">
+      <p:transition spd="med">
+        <p:fade/>
+      </p:transition>
+    </mc:Fallback>
+  </mc:AlternateContent>
+  <p:timing>
+    <p:tnLst>
+      <p:par>
+        <p:cTn id="1" dur="indefinite" restart="never" nodeType="tmRoot">
+          <p:childTnLst>
+            <p:seq concurrent="1" nextAc="seek">
+              <p:cTn id="2" dur="indefinite" nodeType="mainSeq">
+                <p:childTnLst>
+                  <p:par>
+                    <p:cTn id="3" fill="hold">
+                      <p:stCondLst>
+                        <p:cond delay="indefinite"/>
+                      </p:stCondLst>
+                      <p:childTnLst>
+                        <p:par>
+                          <p:cTn id="4" fill="hold">
+                            <p:stCondLst>
+                              <p:cond delay="0"/>
+                            </p:stCondLst>
+                            <p:childTnLst>
+                              <p:par>
+                                <p:cTn id="5" presetID="2" presetClass="entr" presetSubtype="4" fill="hold" grpId="0" nodeType="clickEffect">
+                                  <p:stCondLst>
+                                    <p:cond delay="0"/>
+                                  </p:stCondLst>
+                                  <p:childTnLst>
+                                    <p:set>
+                                      <p:cBhvr>
+                                        <p:cTn id="6" dur="1" fill="hold">
+                                          <p:stCondLst>
+                                            <p:cond delay="0"/>
+                                          </p:stCondLst>
+                                        </p:cTn>
+                                        <p:tgtEl>
+                                          <p:spTgt spid="6"/>
+                                        </p:tgtEl>
+                                        <p:attrNameLst>
+                                          <p:attrName>style.visibility</p:attrName>
+                                        </p:attrNameLst>
+                                      </p:cBhvr>
+                                      <p:to>
+                                        <p:strVal val="visible"/>
+                                      </p:to>
+                                    </p:set>
+                                    <p:anim calcmode="lin" valueType="num">
+                                      <p:cBhvr additive="base">
+                                        <p:cTn id="7" dur="500" fill="hold"/>
+                                        <p:tgtEl>
+                                          <p:spTgt spid="6"/>
+                                        </p:tgtEl>
+                                        <p:attrNameLst>
+                                          <p:attrName>ppt_x</p:attrName>
+                                        </p:attrNameLst>
+                                      </p:cBhvr>
+                                      <p:tavLst>
+                                        <p:tav tm="0">
+                                          <p:val>
+                                            <p:strVal val="#ppt_x"/>
+                                          </p:val>
+                                        </p:tav>
+                                        <p:tav tm="100000">
+                                          <p:val>
+                                            <p:strVal val="#ppt_x"/>
+                                          </p:val>
+                                        </p:tav>
+                                      </p:tavLst>
+                                    </p:anim>
+                                    <p:anim calcmode="lin" valueType="num">
+                                      <p:cBhvr additive="base">
+                                        <p:cTn id="8" dur="500" fill="hold"/>
+                                        <p:tgtEl>
+                                          <p:spTgt spid="6"/>
+                                        </p:tgtEl>
+                                        <p:attrNameLst>
+                                          <p:attrName>ppt_y</p:attrName>
+                                        </p:attrNameLst>
+                                      </p:cBhvr>
+                                      <p:tavLst>
+                                        <p:tav tm="0">
+                                          <p:val>
+                                            <p:strVal val="1+#ppt_h/2"/>
+                                          </p:val>
+                                        </p:tav>
+                                        <p:tav tm="100000">
+                                          <p:val>
+                                            <p:strVal val="#ppt_y"/>
+                                          </p:val>
+                                        </p:tav>
+                                      </p:tavLst>
+                                    </p:anim>
+                                  </p:childTnLst>
+                                </p:cTn>
+                              </p:par>
+                            </p:childTnLst>
+                          </p:cTn>
+                        </p:par>
+                      </p:childTnLst>
+                    </p:cTn>
+                  </p:par>
+                </p:childTnLst>
+              </p:cTn>
+              <p:prevCondLst>
+                <p:cond evt="onPrev" delay="0">
+                  <p:tgtEl>
+                    <p:sldTgt/>
+                  </p:tgtEl>
+                </p:cond>
+              </p:prevCondLst>
+              <p:nextCondLst>
+                <p:cond evt="onNext" delay="0">
+                  <p:tgtEl>
+                    <p:sldTgt/>
+                  </p:tgtEl>
+                </p:cond>
+              </p:nextCondLst>
+            </p:seq>
+          </p:childTnLst>
+        </p:cTn>
+      </p:par>
+    </p:tnLst>
+    <p:bldLst>
+      <p:bldP spid="6" grpId="0"/>
+    </p:bldLst>
+  </p:timing>
+</p:sld>
+</file>
+
+<file path=ppt/slides/slide16.xml><?xml version="1.0" encoding="utf-8"?>
+<p:sld xmlns:a="http://schemas.openxmlformats.org/drawingml/2006/main" xmlns:r="http://schemas.openxmlformats.org/officeDocument/2006/relationships" xmlns:p="http://schemas.openxmlformats.org/presentationml/2006/main">
+  <p:cSld>
+    <p:spTree>
+      <p:nvGrpSpPr>
+        <p:cNvPr id="1" name="YT"/>
+        <p:cNvGrpSpPr/>
+        <p:nvPr/>
+      </p:nvGrpSpPr>
+      <p:grpSpPr>
+        <a:xfrm>
+          <a:off x="0" y="0"/>
+          <a:ext cx="0" cy="0"/>
+          <a:chOff x="0" y="0"/>
+          <a:chExt cx="0" cy="0"/>
+        </a:xfrm>
+      </p:grpSpPr>
+      <p:sp>
+        <p:nvSpPr>
+          <p:cNvPr id="10535" name="yt_shape_10535"/>
+          <p:cNvSpPr txBox="1"/>
+          <p:nvPr/>
+        </p:nvSpPr>
+        <p:spPr>
+          <a:xfrm>
+            <a:off x="324071" y="467999"/>
+            <a:ext cx="11924914" cy="2341923"/>
+          </a:xfrm>
+          <a:prstGeom prst="rect">
+            <a:avLst/>
+          </a:prstGeom>
+        </p:spPr>
+        <p:txBody>
+          <a:bodyPr vert="horz" wrap="square" lIns="0" tIns="0" rIns="0" bIns="0" rtlCol="0">
+            <a:noAutofit/>
+          </a:bodyPr>
+          <a:lstStyle/>
+          <a:p>
+            <a:pPr marL="354965" algn="l" eaLnBrk="1" latinLnBrk="0" hangingPunct="0">
+              <a:lnSpc>
+                <a:spcPct val="140000"/>
+              </a:lnSpc>
+            </a:pPr>
+            <a:r>
+              <a:rPr lang="zh-CN" altLang="zh-CN" sz="2800" b="1" i="0" u="none">
+                <a:solidFill>
+                  <a:srgbClr val="000000"/>
+                </a:solidFill>
+                <a:effectLst/>
+                <a:latin typeface="Times New Roman" pitchFamily="28"/>
+                <a:ea typeface="黑体" pitchFamily="28"/>
+              </a:rPr>
+              <a:t>【典例 】</a:t>
+            </a:r>
+            <a:r>
+              <a:rPr lang="zh-CN" altLang="zh-CN" sz="2800" b="0" i="0" u="none">
+                <a:solidFill>
+                  <a:srgbClr val="000000"/>
+                </a:solidFill>
+                <a:effectLst/>
+                <a:latin typeface="Times New Roman" pitchFamily="28"/>
+                <a:ea typeface="宋体" pitchFamily="28"/>
+              </a:rPr>
+              <a:t> 如图所示，斜面上表面光滑绝缘，倾角为</a:t>
+            </a:r>
+            <a:r>
+              <a:rPr lang="zh-CN" altLang="zh-CN" sz="2800" b="0" i="1" u="none">
+                <a:solidFill>
+                  <a:srgbClr val="000000"/>
+                </a:solidFill>
+                <a:effectLst/>
+                <a:latin typeface="Times New Roman" pitchFamily="28"/>
+                <a:ea typeface="Times New Roman" pitchFamily="28"/>
+              </a:rPr>
+              <a:t>θ</a:t>
+            </a:r>
+            <a:r>
+              <a:rPr lang="zh-CN" altLang="zh-CN" sz="2800" b="0" i="0" u="none">
+                <a:solidFill>
+                  <a:srgbClr val="000000"/>
+                </a:solidFill>
+                <a:effectLst/>
+                <a:latin typeface="Times New Roman" pitchFamily="28"/>
+                <a:ea typeface="宋体" pitchFamily="28"/>
+                <a:sym typeface="_⨹_8_8db7e"/>
+              </a:rPr>
+              <a:t>，斜面上方存在垂</a:t>
+            </a:r>
+            <a:br>
+              <a:rPr lang="zh-CN" altLang="zh-CN" sz="2800" b="0" i="0" u="none">
+                <a:solidFill>
+                  <a:srgbClr val="000000"/>
+                </a:solidFill>
+                <a:effectLst/>
+                <a:latin typeface="Times New Roman" pitchFamily="28"/>
+                <a:ea typeface="宋体" pitchFamily="28"/>
+              </a:rPr>
+            </a:br>
+            <a:r>
+              <a:rPr lang="zh-CN" altLang="zh-CN" sz="2800" b="0" i="0" u="none">
+                <a:solidFill>
+                  <a:srgbClr val="000000"/>
+                </a:solidFill>
+                <a:effectLst/>
+                <a:latin typeface="Times New Roman" pitchFamily="28"/>
+                <a:ea typeface="宋体" pitchFamily="28"/>
+              </a:rPr>
+              <a:t>直纸面向里的匀强磁场，磁感应强度为</a:t>
+            </a:r>
+            <a:r>
+              <a:rPr lang="zh-CN" altLang="zh-CN" sz="2800" b="0" i="1" u="none">
+                <a:solidFill>
+                  <a:srgbClr val="000000"/>
+                </a:solidFill>
+                <a:effectLst/>
+                <a:latin typeface="Times New Roman" pitchFamily="28"/>
+                <a:ea typeface="宋体" pitchFamily="28"/>
+              </a:rPr>
+              <a:t>B</a:t>
+            </a:r>
+            <a:r>
+              <a:rPr lang="zh-CN" altLang="zh-CN" sz="2800" b="0" i="0" u="none">
+                <a:solidFill>
+                  <a:srgbClr val="000000"/>
+                </a:solidFill>
+                <a:effectLst/>
+                <a:latin typeface="Times New Roman" pitchFamily="28"/>
+                <a:ea typeface="宋体" pitchFamily="28"/>
+              </a:rPr>
+              <a:t>。现有一个质量为</a:t>
+            </a:r>
+            <a:r>
+              <a:rPr lang="zh-CN" altLang="zh-CN" sz="2800" b="0" i="1" u="none">
+                <a:solidFill>
+                  <a:srgbClr val="000000"/>
+                </a:solidFill>
+                <a:effectLst/>
+                <a:latin typeface="Times New Roman" pitchFamily="28"/>
+                <a:ea typeface="宋体" pitchFamily="28"/>
+              </a:rPr>
+              <a:t>m</a:t>
+            </a:r>
+            <a:r>
+              <a:rPr lang="zh-CN" altLang="zh-CN" sz="2800" b="0" i="0" u="none">
+                <a:solidFill>
+                  <a:srgbClr val="000000"/>
+                </a:solidFill>
+                <a:effectLst/>
+                <a:latin typeface="Times New Roman" pitchFamily="28"/>
+                <a:ea typeface="宋体" pitchFamily="28"/>
+                <a:sym typeface="_⨹_5_90316"/>
+              </a:rPr>
+              <a:t>、带电荷量</a:t>
+            </a:r>
+            <a:br>
+              <a:rPr lang="zh-CN" altLang="zh-CN" sz="2800" b="0" i="0" u="none">
+                <a:solidFill>
+                  <a:srgbClr val="000000"/>
+                </a:solidFill>
+                <a:effectLst/>
+                <a:latin typeface="Times New Roman" pitchFamily="28"/>
+                <a:ea typeface="宋体" pitchFamily="28"/>
+              </a:rPr>
+            </a:br>
+            <a:r>
+              <a:rPr lang="zh-CN" altLang="zh-CN" sz="2800" b="0" i="0" u="none">
+                <a:solidFill>
+                  <a:srgbClr val="000000"/>
+                </a:solidFill>
+                <a:effectLst/>
+                <a:latin typeface="Times New Roman" pitchFamily="28"/>
+                <a:ea typeface="宋体" pitchFamily="28"/>
+              </a:rPr>
+              <a:t>为＋</a:t>
+            </a:r>
+            <a:r>
+              <a:rPr lang="zh-CN" altLang="zh-CN" sz="2800" b="0" i="1" u="none">
+                <a:solidFill>
+                  <a:srgbClr val="000000"/>
+                </a:solidFill>
+                <a:effectLst/>
+                <a:latin typeface="Times New Roman" pitchFamily="28"/>
+                <a:ea typeface="宋体" pitchFamily="28"/>
+              </a:rPr>
+              <a:t>q</a:t>
+            </a:r>
+            <a:r>
+              <a:rPr lang="zh-CN" altLang="zh-CN" sz="2800" b="0" i="0" u="none">
+                <a:solidFill>
+                  <a:srgbClr val="000000"/>
+                </a:solidFill>
+                <a:effectLst/>
+                <a:latin typeface="Times New Roman" pitchFamily="28"/>
+                <a:ea typeface="宋体" pitchFamily="28"/>
+                <a:sym typeface="_⨹_28_1bfa2"/>
+              </a:rPr>
+              <a:t>的小球在斜面上被无初速度释放，假设斜面足够长，重力加速度</a:t>
+            </a:r>
+            <a:br>
+              <a:rPr lang="zh-CN" altLang="zh-CN" sz="2800" b="0" i="0" u="none">
+                <a:solidFill>
+                  <a:srgbClr val="000000"/>
+                </a:solidFill>
+                <a:effectLst/>
+                <a:latin typeface="Times New Roman" pitchFamily="28"/>
+                <a:ea typeface="宋体" pitchFamily="28"/>
+              </a:rPr>
+            </a:br>
+            <a:r>
+              <a:rPr lang="zh-CN" altLang="zh-CN" sz="2800" b="0" i="0" u="none">
+                <a:solidFill>
+                  <a:srgbClr val="000000"/>
+                </a:solidFill>
+                <a:effectLst/>
+                <a:latin typeface="Times New Roman" pitchFamily="28"/>
+                <a:ea typeface="宋体" pitchFamily="28"/>
+              </a:rPr>
+              <a:t>为</a:t>
+            </a:r>
+            <a:r>
+              <a:rPr lang="zh-CN" altLang="zh-CN" sz="2800" b="0" i="1" u="none">
+                <a:solidFill>
+                  <a:srgbClr val="000000"/>
+                </a:solidFill>
+                <a:effectLst/>
+                <a:latin typeface="Times New Roman" pitchFamily="28"/>
+                <a:ea typeface="宋体" pitchFamily="28"/>
+              </a:rPr>
+              <a:t>g</a:t>
+            </a:r>
+            <a:r>
+              <a:rPr lang="zh-CN" altLang="zh-CN" sz="2800" b="0" i="0" u="none">
+                <a:solidFill>
+                  <a:srgbClr val="000000"/>
+                </a:solidFill>
+                <a:effectLst/>
+                <a:latin typeface="Times New Roman" pitchFamily="28"/>
+                <a:ea typeface="宋体" pitchFamily="28"/>
+              </a:rPr>
+              <a:t>，求小球从释放开始，下滑多远后离开斜面。</a:t>
+            </a:r>
+          </a:p>
+        </p:txBody>
+      </p:sp>
+      <p:pic>
+        <p:nvPicPr>
+          <p:cNvPr id="10536" name="yt_image_10536" title="H_129.88795">
+            <a:extLst>
+              <a:ext uri="">
+                <a16:creationId xmlns:a16="http://schemas.microsoft.com/office/drawing/2014/main" xmlns:p15="http://schemas.microsoft.com/office/powerpoint/2012/main" xmlns:mc="http://schemas.openxmlformats.org/markup-compatibility/2006" xmlns:a14="http://schemas.microsoft.com/office/drawing/2010/main" xmlns="" id="{5351258F-BC95-41E6-9372-C2FE361B0291}"/>
+              </a:ext>
+            </a:extLst>
+          </p:cNvPr>
+          <p:cNvPicPr>
+            <a:picLocks noChangeAspect="1" noChangeArrowheads="1"/>
+          </p:cNvPicPr>
+          <p:nvPr/>
+        </p:nvPicPr>
+        <p:blipFill>
+          <a:blip r:embed="rId2" cstate="print">
+            <a:extLst>
+              <a:ext uri="{28A0092B-C50C-407E-A947-70E740481C1C}">
+                <a14:useLocalDpi xmlns:a14="http://schemas.microsoft.com/office/drawing/2010/main" val="0"/>
+              </a:ext>
+            </a:extLst>
+          </a:blip>
+          <a:srcRect/>
+          <a:stretch>
+            <a:fillRect/>
+          </a:stretch>
+        </p:blipFill>
+        <p:spPr bwMode="auto">
+          <a:xfrm>
+            <a:off x="4861559" y="3013074"/>
+            <a:ext cx="2468880" cy="1649577"/>
+          </a:xfrm>
+          <a:prstGeom prst="rect">
+            <a:avLst/>
+          </a:prstGeom>
+          <a:noFill/>
+          <a:extLst>
+            <a:ext uri="{909E8E84-426E-40DD-AFC4-6F175D3DCCD1}">
+              <a14:hiddenFill xmlns:a14="http://schemas.microsoft.com/office/drawing/2010/main">
+                <a:solidFill>
+                  <a:srgbClr val="FFFFFF"/>
+                </a:solidFill>
+              </a14:hiddenFill>
+            </a:ext>
+          </a:extLst>
+        </p:spPr>
+      </p:pic>
+      <mc:AlternateContent xmlns:mc="http://schemas.openxmlformats.org/markup-compatibility/2006" xmlns:a14="http://schemas.microsoft.com/office/drawing/2010/main">
+        <mc:Choice Requires="a14">
+          <p:sp>
+            <p:nvSpPr>
+              <p:cNvPr id="10538" name="yt_shape_10538"/>
+              <p:cNvSpPr txBox="1"/>
+              <p:nvPr/>
+            </p:nvSpPr>
+            <p:spPr>
+              <a:xfrm>
+                <a:off x="324000" y="4713075"/>
+                <a:ext cx="2820452" cy="969304"/>
+              </a:xfrm>
+              <a:prstGeom prst="rect">
+                <a:avLst/>
+              </a:prstGeom>
+            </p:spPr>
+            <p:txBody>
+              <a:bodyPr vert="horz" wrap="none" lIns="0" tIns="0" rIns="0" bIns="0" rtlCol="0">
+                <a:noAutofit/>
+              </a:bodyPr>
+              <a:lstStyle/>
+              <a:p>
+                <a:pPr marL="354965" algn="l" eaLnBrk="1" latinLnBrk="0" hangingPunct="0">
+                  <a:lnSpc>
+                    <a:spcPct val="140000"/>
+                  </a:lnSpc>
+                </a:pPr>
+                <a:r>
+                  <a:rPr lang="zh-CN" altLang="zh-CN" sz="2800" b="1" i="0" u="none">
+                    <a:solidFill>
+                      <a:srgbClr val="0000FF"/>
+                    </a:solidFill>
+                    <a:effectLst/>
+                    <a:latin typeface="Times New Roman" pitchFamily="28"/>
+                    <a:ea typeface="黑体" pitchFamily="28"/>
+                  </a:rPr>
+                  <a:t>答案：</a:t>
+                </a:r>
+                <a14:m>
+                  <m:oMath xmlns:m="http://schemas.openxmlformats.org/officeDocument/2006/math">
+                    <m:f>
+                      <m:fPr>
+                        <m:ctrlPr>
+                          <a:rPr lang="en-US" altLang="zh-CN" sz="2800" b="0" i="1">
+                            <a:solidFill>
+                              <a:srgbClr val="C00000"/>
+                            </a:solidFill>
+                            <a:effectLst/>
+                            <a:latin typeface="Cambria Math" panose="02040503050406030204" pitchFamily="18" charset="0"/>
+                            <a:ea typeface="Cambria Math" panose="02040503050406030204" pitchFamily="56" charset="0"/>
+                          </a:rPr>
+                        </m:ctrlPr>
+                      </m:fPr>
+                      <m:num>
+                        <m:sSup>
+                          <m:sSupPr>
+                            <m:ctrlPr>
+                              <a:rPr lang="en-US" altLang="zh-CN" sz="2800" b="0" i="1">
+                                <a:solidFill>
+                                  <a:srgbClr val="C00000"/>
+                                </a:solidFill>
+                                <a:effectLst/>
+                                <a:latin typeface="Cambria Math" panose="02040503050406030204" pitchFamily="56" charset="0"/>
+                                <a:ea typeface="Cambria Math" panose="02040503050406030204" pitchFamily="56" charset="0"/>
+                              </a:rPr>
+                            </m:ctrlPr>
+                          </m:sSupPr>
+                          <m:e>
+                            <m:r>
+                              <a:rPr lang="en-US" altLang="zh-CN" sz="2800" b="0" i="1">
+                                <a:solidFill>
+                                  <a:srgbClr val="C00000"/>
+                                </a:solidFill>
+                                <a:effectLst/>
+                                <a:latin typeface="Cambria Math" panose="02040503050406030204" pitchFamily="56" charset="0"/>
+                                <a:ea typeface="Cambria Math" panose="02040503050406030204" pitchFamily="56" charset="0"/>
+                              </a:rPr>
+                              <m:t>𝑚</m:t>
+                            </m:r>
+                          </m:e>
+                          <m:sup>
+                            <m:r>
+                              <a:rPr lang="en-US" altLang="zh-CN" sz="2800" b="0" i="1">
+                                <a:solidFill>
+                                  <a:srgbClr val="C00000"/>
+                                </a:solidFill>
+                                <a:effectLst/>
+                                <a:latin typeface="Cambria Math" panose="02040503050406030204" pitchFamily="56" charset="0"/>
+                                <a:ea typeface="Cambria Math" panose="02040503050406030204" pitchFamily="56" charset="0"/>
+                              </a:rPr>
+                              <m:t>2</m:t>
+                            </m:r>
+                          </m:sup>
+                        </m:sSup>
+                        <m:r>
+                          <a:rPr lang="en-US" altLang="zh-CN" sz="2800" b="0" i="1">
+                            <a:solidFill>
+                              <a:srgbClr val="C00000"/>
+                            </a:solidFill>
+                            <a:effectLst/>
+                            <a:latin typeface="Cambria Math" panose="02040503050406030204" pitchFamily="56" charset="0"/>
+                            <a:ea typeface="Cambria Math" panose="02040503050406030204" pitchFamily="56" charset="0"/>
+                          </a:rPr>
+                          <m:t>𝑔</m:t>
+                        </m:r>
+                        <m:r>
+                          <m:rPr>
+                            <m:sty m:val="p"/>
+                          </m:rPr>
+                          <a:rPr lang="en-US" altLang="zh-CN" sz="2800" b="0" i="0">
+                            <a:solidFill>
+                              <a:srgbClr val="C00000"/>
+                            </a:solidFill>
+                            <a:effectLst/>
+                            <a:latin typeface="Cambria Math" panose="02040503050406030204" pitchFamily="56" charset="0"/>
+                            <a:ea typeface="Cambria Math" panose="02040503050406030204" pitchFamily="56" charset="0"/>
+                          </a:rPr>
+                          <m:t>co</m:t>
+                        </m:r>
+                        <m:sSup>
+                          <m:sSupPr>
+                            <m:ctrlPr>
+                              <a:rPr lang="en-US" altLang="zh-CN" sz="2800" b="0" i="0">
+                                <a:solidFill>
+                                  <a:srgbClr val="C00000"/>
+                                </a:solidFill>
+                                <a:effectLst/>
+                                <a:latin typeface="Cambria Math" panose="02040503050406030204" pitchFamily="56" charset="0"/>
+                                <a:ea typeface="Cambria Math" panose="02040503050406030204" pitchFamily="56" charset="0"/>
+                              </a:rPr>
+                            </m:ctrlPr>
+                          </m:sSupPr>
+                          <m:e>
+                            <m:r>
+                              <m:rPr>
+                                <m:sty m:val="p"/>
+                              </m:rPr>
+                              <a:rPr lang="en-US" altLang="zh-CN" sz="2800" b="0" i="0">
+                                <a:solidFill>
+                                  <a:srgbClr val="C00000"/>
+                                </a:solidFill>
+                                <a:effectLst/>
+                                <a:latin typeface="Cambria Math" panose="02040503050406030204" pitchFamily="56" charset="0"/>
+                                <a:ea typeface="Cambria Math" panose="02040503050406030204" pitchFamily="56" charset="0"/>
+                              </a:rPr>
+                              <m:t>s</m:t>
+                            </m:r>
+                          </m:e>
+                          <m:sup>
+                            <m:r>
+                              <a:rPr lang="en-US" altLang="zh-CN" sz="2800" b="0" i="1">
+                                <a:solidFill>
+                                  <a:srgbClr val="C00000"/>
+                                </a:solidFill>
+                                <a:effectLst/>
+                                <a:latin typeface="Cambria Math" panose="02040503050406030204" pitchFamily="56" charset="0"/>
+                                <a:ea typeface="Cambria Math" panose="02040503050406030204" pitchFamily="56" charset="0"/>
+                              </a:rPr>
+                              <m:t>2</m:t>
+                            </m:r>
+                          </m:sup>
+                        </m:sSup>
+                        <m:r>
+                          <m:rPr>
+                            <m:nor/>
+                          </m:rPr>
+                          <a:rPr lang="en-US" altLang="zh-CN" sz="2800" b="0" i="0">
+                            <a:solidFill>
+                              <a:srgbClr val="C00000"/>
+                            </a:solidFill>
+                            <a:effectLst/>
+                            <a:latin typeface="Cambria Math" panose="02040503050406030204" pitchFamily="56" charset="0"/>
+                            <a:ea typeface="宋体" panose="02040503050406030204" pitchFamily="56" charset="0"/>
+                          </a:rPr>
+                          <m:t>θ</m:t>
+                        </m:r>
+                      </m:num>
+                      <m:den>
+                        <m:r>
+                          <a:rPr lang="en-US" altLang="zh-CN" sz="2800" b="0" i="1">
+                            <a:solidFill>
+                              <a:srgbClr val="C00000"/>
+                            </a:solidFill>
+                            <a:effectLst/>
+                            <a:latin typeface="Cambria Math" panose="02040503050406030204" pitchFamily="56" charset="0"/>
+                            <a:ea typeface="Cambria Math" panose="02040503050406030204" pitchFamily="56" charset="0"/>
+                          </a:rPr>
+                          <m:t>2</m:t>
+                        </m:r>
+                        <m:sSup>
+                          <m:sSupPr>
+                            <m:ctrlPr>
+                              <a:rPr lang="en-US" altLang="zh-CN" sz="2800" b="0" i="1">
+                                <a:solidFill>
+                                  <a:srgbClr val="C00000"/>
+                                </a:solidFill>
+                                <a:effectLst/>
+                                <a:latin typeface="Cambria Math" panose="02040503050406030204" pitchFamily="56" charset="0"/>
+                                <a:ea typeface="Cambria Math" panose="02040503050406030204" pitchFamily="56" charset="0"/>
+                              </a:rPr>
+                            </m:ctrlPr>
+                          </m:sSupPr>
+                          <m:e>
+                            <m:r>
+                              <a:rPr lang="en-US" altLang="zh-CN" sz="2800" b="0" i="1">
+                                <a:solidFill>
+                                  <a:srgbClr val="C00000"/>
+                                </a:solidFill>
+                                <a:effectLst/>
+                                <a:latin typeface="Cambria Math" panose="02040503050406030204" pitchFamily="56" charset="0"/>
+                                <a:ea typeface="Cambria Math" panose="02040503050406030204" pitchFamily="56" charset="0"/>
+                              </a:rPr>
+                              <m:t>𝑞</m:t>
+                            </m:r>
+                          </m:e>
+                          <m:sup>
+                            <m:r>
+                              <a:rPr lang="en-US" altLang="zh-CN" sz="2800" b="0" i="1">
+                                <a:solidFill>
+                                  <a:srgbClr val="C00000"/>
+                                </a:solidFill>
+                                <a:effectLst/>
+                                <a:latin typeface="Cambria Math" panose="02040503050406030204" pitchFamily="56" charset="0"/>
+                                <a:ea typeface="Cambria Math" panose="02040503050406030204" pitchFamily="56" charset="0"/>
+                              </a:rPr>
+                              <m:t>2</m:t>
+                            </m:r>
+                          </m:sup>
+                        </m:sSup>
+                        <m:sSup>
+                          <m:sSupPr>
+                            <m:ctrlPr>
+                              <a:rPr lang="en-US" altLang="zh-CN" sz="2800" b="0" i="1">
+                                <a:solidFill>
+                                  <a:srgbClr val="C00000"/>
+                                </a:solidFill>
+                                <a:effectLst/>
+                                <a:latin typeface="Cambria Math" panose="02040503050406030204" pitchFamily="56" charset="0"/>
+                                <a:ea typeface="Cambria Math" panose="02040503050406030204" pitchFamily="56" charset="0"/>
+                              </a:rPr>
+                            </m:ctrlPr>
+                          </m:sSupPr>
+                          <m:e>
+                            <m:r>
+                              <a:rPr lang="en-US" altLang="zh-CN" sz="2800" b="0" i="1">
+                                <a:solidFill>
+                                  <a:srgbClr val="C00000"/>
+                                </a:solidFill>
+                                <a:effectLst/>
+                                <a:latin typeface="Cambria Math" panose="02040503050406030204" pitchFamily="56" charset="0"/>
+                                <a:ea typeface="Cambria Math" panose="02040503050406030204" pitchFamily="56" charset="0"/>
+                              </a:rPr>
+                              <m:t>𝐵</m:t>
+                            </m:r>
+                          </m:e>
+                          <m:sup>
+                            <m:r>
+                              <a:rPr lang="en-US" altLang="zh-CN" sz="2800" b="0" i="1">
+                                <a:solidFill>
+                                  <a:srgbClr val="C00000"/>
+                                </a:solidFill>
+                                <a:effectLst/>
+                                <a:latin typeface="Cambria Math" panose="02040503050406030204" pitchFamily="56" charset="0"/>
+                                <a:ea typeface="Cambria Math" panose="02040503050406030204" pitchFamily="56" charset="0"/>
+                              </a:rPr>
+                              <m:t>2</m:t>
+                            </m:r>
+                          </m:sup>
+                        </m:sSup>
+                        <m:r>
+                          <m:rPr>
+                            <m:sty m:val="p"/>
+                          </m:rPr>
+                          <a:rPr lang="en-US" altLang="zh-CN" sz="2800" b="0" i="0">
+                            <a:solidFill>
+                              <a:srgbClr val="C00000"/>
+                            </a:solidFill>
+                            <a:effectLst/>
+                            <a:latin typeface="Cambria Math" panose="02040503050406030204" pitchFamily="56" charset="0"/>
+                            <a:ea typeface="Cambria Math" panose="02040503050406030204" pitchFamily="56" charset="0"/>
+                          </a:rPr>
+                          <m:t>sin</m:t>
+                        </m:r>
+                        <m:r>
+                          <m:rPr>
+                            <m:nor/>
+                          </m:rPr>
+                          <a:rPr lang="en-US" altLang="zh-CN" sz="2800" b="0" i="0">
+                            <a:solidFill>
+                              <a:srgbClr val="C00000"/>
+                            </a:solidFill>
+                            <a:effectLst/>
+                            <a:latin typeface="Cambria Math" panose="02040503050406030204" pitchFamily="56" charset="0"/>
+                            <a:ea typeface="宋体" panose="02040503050406030204" pitchFamily="56" charset="0"/>
+                          </a:rPr>
+                          <m:t>θ</m:t>
+                        </m:r>
+                      </m:den>
+                    </m:f>
+                  </m:oMath>
+                </a14:m>
+                <a:endParaRPr lang="zh-CN" altLang="zh-CN" sz="2800" b="1" i="0" u="none">
+                  <a:solidFill>
+                    <a:srgbClr val="FF0000"/>
+                  </a:solidFill>
+                  <a:effectLst/>
+                  <a:latin typeface="Times New Roman" pitchFamily="28"/>
+                  <a:ea typeface="黑体" pitchFamily="28"/>
+                </a:endParaRPr>
+              </a:p>
+            </p:txBody>
+          </p:sp>
+        </mc:Choice>
+        <mc:Fallback xmlns="">
+          <p:sp>
+            <p:nvSpPr>
+              <p:cNvPr id="10538" name="yt_shape_10538"/>
+              <p:cNvSpPr txBox="1">
+                <a:spLocks noRot="1" noChangeAspect="1" noMove="1" noResize="1" noEditPoints="1" noAdjustHandles="1" noChangeArrowheads="1" noChangeShapeType="1" noTextEdit="1"/>
+              </p:cNvSpPr>
+              <p:nvPr/>
+            </p:nvSpPr>
+            <p:spPr>
+              <a:xfrm>
+                <a:off x="324000" y="4713075"/>
+                <a:ext cx="2820452" cy="969304"/>
+              </a:xfrm>
+              <a:prstGeom prst="rect">
+                <a:avLst/>
+              </a:prstGeom>
+              <a:blipFill>
+                <a:blip r:embed="rId3"/>
+                <a:stretch>
+                  <a:fillRect b="-3774"/>
+                </a:stretch>
+              </a:blipFill>
+            </p:spPr>
+            <p:txBody>
+              <a:bodyPr/>
+              <a:lstStyle/>
+              <a:p>
+                <a:r>
+                  <a:rPr lang="zh-CN" altLang="en-US">
+                    <a:noFill/>
+                  </a:rPr>
+                  <a:t> </a:t>
+                </a:r>
+              </a:p>
+            </p:txBody>
+          </p:sp>
+        </mc:Fallback>
+      </mc:AlternateContent>
+    </p:spTree>
+  </p:cSld>
+  <p:clrMapOvr>
+    <a:masterClrMapping/>
+  </p:clrMapOvr>
+  <mc:AlternateContent xmlns:mc="http://schemas.openxmlformats.org/markup-compatibility/2006" xmlns:p15="http://schemas.microsoft.com/office/powerpoint/2012/main">
+    <mc:Choice Requires="p15">
+      <p:transition spd="med">
+        <p15:prstTrans prst="pageCurlDouble"/>
+      </p:transition>
+    </mc:Choice>
+    <mc:Fallback xmlns:a14="http://schemas.microsoft.com/office/drawing/2010/main" xmlns:a16="http://schemas.microsoft.com/office/drawing/2014/main" xmlns="">
+      <p:transition spd="med">
+        <p:fade/>
+      </p:transition>
+    </mc:Fallback>
+  </mc:AlternateContent>
+  <p:timing>
+    <p:tnLst>
+      <p:par>
+        <p:cTn id="1" dur="indefinite" restart="never" nodeType="tmRoot">
+          <p:childTnLst>
+            <p:seq concurrent="1" nextAc="seek">
+              <p:cTn id="2" dur="indefinite" nodeType="mainSeq">
+                <p:childTnLst>
+                  <p:par>
+                    <p:cTn id="3" fill="hold">
+                      <p:stCondLst>
+                        <p:cond delay="indefinite"/>
+                      </p:stCondLst>
+                      <p:childTnLst>
+                        <p:par>
+                          <p:cTn id="4" fill="hold">
+                            <p:stCondLst>
+                              <p:cond delay="0"/>
+                            </p:stCondLst>
+                            <p:childTnLst>
+                              <p:par>
+                                <p:cTn id="5" presetID="3" presetClass="entr" presetSubtype="10" fill="hold" grpId="0" nodeType="clickEffect">
+                                  <p:stCondLst>
+                                    <p:cond delay="0"/>
+                                  </p:stCondLst>
+                                  <p:childTnLst>
+                                    <p:set>
+                                      <p:cBhvr>
+                                        <p:cTn id="6" dur="1" fill="hold">
+                                          <p:stCondLst>
+                                            <p:cond delay="0"/>
+                                          </p:stCondLst>
+                                        </p:cTn>
+                                        <p:tgtEl>
+                                          <p:spTgt spid="10538">
+                                            <p:txEl>
+                                              <p:pRg st="0" end="0"/>
+                                            </p:txEl>
+                                          </p:spTgt>
+                                        </p:tgtEl>
+                                        <p:attrNameLst>
+                                          <p:attrName>style.visibility</p:attrName>
+                                        </p:attrNameLst>
+                                      </p:cBhvr>
+                                      <p:to>
+                                        <p:strVal val="visible"/>
+                                      </p:to>
+                                    </p:set>
+                                    <p:animEffect transition="in" filter="blinds(horizontal)">
+                                      <p:cBhvr>
+                                        <p:cTn id="7" dur="500"/>
+                                        <p:tgtEl>
+                                          <p:spTgt spid="10538">
+                                            <p:txEl>
+                                              <p:pRg st="0" end="0"/>
+                                            </p:txEl>
+                                          </p:spTgt>
+                                        </p:tgtEl>
+                                      </p:cBhvr>
+                                    </p:animEffect>
+                                  </p:childTnLst>
+                                </p:cTn>
+                              </p:par>
+                            </p:childTnLst>
+                          </p:cTn>
+                        </p:par>
+                      </p:childTnLst>
+                    </p:cTn>
+                  </p:par>
+                </p:childTnLst>
+              </p:cTn>
+              <p:prevCondLst>
+                <p:cond evt="onPrev" delay="0">
+                  <p:tgtEl>
+                    <p:sldTgt/>
+                  </p:tgtEl>
+                </p:cond>
+              </p:prevCondLst>
+              <p:nextCondLst>
+                <p:cond evt="onNext" delay="0">
+                  <p:tgtEl>
+                    <p:sldTgt/>
+                  </p:tgtEl>
+                </p:cond>
+              </p:nextCondLst>
+            </p:seq>
+          </p:childTnLst>
+        </p:cTn>
+      </p:par>
+    </p:tnLst>
+    <p:bldLst>
+      <p:bldP spid="10538" grpId="0" build="allAtOnce"/>
+    </p:bldLst>
+  </p:timing>
+</p:sld>
+</file>
+
+<file path=ppt/slides/slide17.xml><?xml version="1.0" encoding="utf-8"?>
+<p:sld xmlns:a="http://schemas.openxmlformats.org/drawingml/2006/main" xmlns:r="http://schemas.openxmlformats.org/officeDocument/2006/relationships" xmlns:p="http://schemas.openxmlformats.org/presentationml/2006/main">
+  <p:cSld>
+    <p:spTree>
+      <p:nvGrpSpPr>
+        <p:cNvPr id="1" name="YT"/>
+        <p:cNvGrpSpPr/>
+        <p:nvPr/>
+      </p:nvGrpSpPr>
+      <p:grpSpPr>
+        <a:xfrm>
+          <a:off x="0" y="0"/>
+          <a:ext cx="0" cy="0"/>
+          <a:chOff x="0" y="0"/>
+          <a:chExt cx="0" cy="0"/>
+        </a:xfrm>
+      </p:grpSpPr>
+      <mc:AlternateContent xmlns:mc="http://schemas.openxmlformats.org/markup-compatibility/2006" xmlns:a14="http://schemas.microsoft.com/office/drawing/2010/main">
+        <mc:Choice Requires="a14">
+          <p:sp>
+            <p:nvSpPr>
+              <p:cNvPr id="10540" name="yt_shape_10540"/>
+              <p:cNvSpPr txBox="1"/>
+              <p:nvPr/>
+            </p:nvSpPr>
+            <p:spPr>
+              <a:xfrm>
+                <a:off x="324071" y="467999"/>
+                <a:ext cx="9383332" cy="6110601"/>
+              </a:xfrm>
+              <a:prstGeom prst="rect">
+                <a:avLst/>
+              </a:prstGeom>
+            </p:spPr>
+            <p:txBody>
+              <a:bodyPr vert="horz" wrap="square" lIns="0" tIns="0" rIns="0" bIns="0" rtlCol="0">
+                <a:noAutofit/>
+              </a:bodyPr>
+              <a:lstStyle/>
+              <a:p>
+                <a:pPr marL="354965" algn="l" eaLnBrk="1" latinLnBrk="0" hangingPunct="0">
+                  <a:lnSpc>
+                    <a:spcPct val="140000"/>
+                  </a:lnSpc>
+                </a:pPr>
+                <a:r>
+                  <a:rPr lang="zh-CN" altLang="zh-CN" sz="2800" b="1" i="0" u="none" dirty="0">
+                    <a:solidFill>
+                      <a:srgbClr val="0000FF"/>
+                    </a:solidFill>
+                    <a:effectLst/>
+                    <a:latin typeface="Times New Roman" pitchFamily="28"/>
+                    <a:ea typeface="黑体" pitchFamily="28"/>
+                  </a:rPr>
+                  <a:t>解析：</a:t>
+                </a:r>
+                <a:r>
+                  <a:rPr lang="zh-CN" altLang="zh-CN" sz="2800" b="0" i="0" u="none" dirty="0">
+                    <a:solidFill>
+                      <a:srgbClr val="C00000"/>
+                    </a:solidFill>
+                    <a:effectLst/>
+                    <a:latin typeface="Times New Roman" pitchFamily="28"/>
+                    <a:ea typeface="仿宋" pitchFamily="28"/>
+                    <a:sym typeface="_⨹_21_4b731"/>
+                  </a:rPr>
+                  <a:t>小球沿斜面下滑，在离开斜面前，受到洛伦兹力</a:t>
+                </a:r>
+                <a:br>
+                  <a:rPr lang="zh-CN" altLang="zh-CN" sz="2800" b="0" i="0" u="none" dirty="0">
+                    <a:solidFill>
+                      <a:srgbClr val="C00000"/>
+                    </a:solidFill>
+                    <a:effectLst/>
+                    <a:latin typeface="Times New Roman" pitchFamily="28"/>
+                    <a:ea typeface="仿宋" pitchFamily="28"/>
+                  </a:rPr>
+                </a:br>
+                <a:r>
+                  <a:rPr lang="zh-CN" altLang="zh-CN" sz="2800" b="0" i="1" u="none" dirty="0">
+                    <a:solidFill>
+                      <a:srgbClr val="C00000"/>
+                    </a:solidFill>
+                    <a:effectLst/>
+                    <a:latin typeface="Times New Roman" pitchFamily="28"/>
+                    <a:ea typeface="仿宋" pitchFamily="28"/>
+                  </a:rPr>
+                  <a:t>F</a:t>
+                </a:r>
+                <a:r>
+                  <a:rPr lang="zh-CN" altLang="zh-CN" sz="2800" b="0" i="0" u="none" dirty="0">
+                    <a:solidFill>
+                      <a:srgbClr val="C00000"/>
+                    </a:solidFill>
+                    <a:effectLst/>
+                    <a:latin typeface="Times New Roman" pitchFamily="28"/>
+                    <a:ea typeface="仿宋" pitchFamily="28"/>
+                  </a:rPr>
+                  <a:t>，垂直斜面向上，小球受力分析如图所示。</a:t>
+                </a:r>
+              </a:p>
+              <a:p>
+                <a:pPr marL="354965" algn="l" eaLnBrk="1" latinLnBrk="0" hangingPunct="0">
+                  <a:lnSpc>
+                    <a:spcPct val="140000"/>
+                  </a:lnSpc>
+                </a:pPr>
+                <a:r>
+                  <a:rPr lang="zh-CN" altLang="zh-CN" sz="2800" b="0" i="0" u="none" dirty="0">
+                    <a:solidFill>
+                      <a:srgbClr val="C00000"/>
+                    </a:solidFill>
+                    <a:effectLst/>
+                    <a:latin typeface="Times New Roman" pitchFamily="28"/>
+                    <a:ea typeface="仿宋" pitchFamily="28"/>
+                  </a:rPr>
+                  <a:t>沿斜面方向有</a:t>
+                </a:r>
+                <a:r>
+                  <a:rPr lang="en-US" altLang="zh-CN" sz="2800" b="0" i="0" u="none" dirty="0">
+                    <a:solidFill>
+                      <a:srgbClr val="C00000"/>
+                    </a:solidFill>
+                    <a:effectLst/>
+                    <a:latin typeface="Times New Roman" pitchFamily="28"/>
+                    <a:ea typeface="仿宋" pitchFamily="28"/>
+                  </a:rPr>
+                  <a:t>       </a:t>
+                </a:r>
+                <a:r>
+                  <a:rPr lang="zh-CN" altLang="zh-CN" sz="2800" b="0" i="1" u="none" dirty="0">
+                    <a:solidFill>
+                      <a:srgbClr val="C00000"/>
+                    </a:solidFill>
+                    <a:effectLst/>
+                    <a:latin typeface="Times New Roman" pitchFamily="28"/>
+                    <a:ea typeface="仿宋" pitchFamily="28"/>
+                  </a:rPr>
+                  <a:t>mg</a:t>
+                </a:r>
+                <a:r>
+                  <a:rPr lang="zh-CN" altLang="zh-CN" sz="2800" b="0" i="0" u="none" dirty="0">
+                    <a:solidFill>
+                      <a:srgbClr val="C00000"/>
+                    </a:solidFill>
+                    <a:effectLst/>
+                    <a:latin typeface="Times New Roman" pitchFamily="28"/>
+                    <a:ea typeface="仿宋" pitchFamily="28"/>
+                  </a:rPr>
+                  <a:t>sin </a:t>
+                </a:r>
+                <a:r>
+                  <a:rPr lang="zh-CN" altLang="zh-CN" sz="2800" b="0" i="1" u="none" dirty="0">
+                    <a:solidFill>
+                      <a:srgbClr val="C00000"/>
+                    </a:solidFill>
+                    <a:effectLst/>
+                    <a:latin typeface="Times New Roman" pitchFamily="28"/>
+                    <a:ea typeface="Times New Roman" pitchFamily="28"/>
+                  </a:rPr>
+                  <a:t>θ</a:t>
+                </a:r>
+                <a:r>
+                  <a:rPr lang="zh-CN" altLang="zh-CN" sz="2800" b="0" i="0" u="none" dirty="0">
+                    <a:solidFill>
+                      <a:srgbClr val="C00000"/>
+                    </a:solidFill>
+                    <a:effectLst/>
+                    <a:latin typeface="Times New Roman" pitchFamily="28"/>
+                    <a:ea typeface="仿宋" pitchFamily="28"/>
+                  </a:rPr>
+                  <a:t>=</a:t>
+                </a:r>
+                <a:r>
+                  <a:rPr lang="zh-CN" altLang="zh-CN" sz="2800" b="0" i="1" u="none" dirty="0">
+                    <a:solidFill>
+                      <a:srgbClr val="C00000"/>
+                    </a:solidFill>
+                    <a:effectLst/>
+                    <a:latin typeface="Times New Roman" pitchFamily="28"/>
+                    <a:ea typeface="仿宋" pitchFamily="28"/>
+                  </a:rPr>
+                  <a:t>ma</a:t>
+                </a:r>
+              </a:p>
+              <a:p>
+                <a:pPr marL="354965" algn="l" eaLnBrk="1" latinLnBrk="0" hangingPunct="0">
+                  <a:lnSpc>
+                    <a:spcPct val="140000"/>
+                  </a:lnSpc>
+                </a:pPr>
+                <a:r>
+                  <a:rPr lang="zh-CN" altLang="zh-CN" sz="2800" b="0" i="0" u="none" dirty="0">
+                    <a:solidFill>
+                      <a:srgbClr val="C00000"/>
+                    </a:solidFill>
+                    <a:effectLst/>
+                    <a:latin typeface="Times New Roman" pitchFamily="28"/>
+                    <a:ea typeface="仿宋" pitchFamily="28"/>
+                  </a:rPr>
+                  <a:t>垂直斜面方向有</a:t>
+                </a:r>
+                <a:r>
+                  <a:rPr lang="en-US" altLang="zh-CN" sz="2800" b="0" i="0" u="none" dirty="0">
+                    <a:solidFill>
+                      <a:srgbClr val="C00000"/>
+                    </a:solidFill>
+                    <a:effectLst/>
+                    <a:latin typeface="Times New Roman" pitchFamily="28"/>
+                    <a:ea typeface="仿宋" pitchFamily="28"/>
+                  </a:rPr>
+                  <a:t>    </a:t>
+                </a:r>
+                <a:r>
+                  <a:rPr lang="zh-CN" altLang="zh-CN" sz="2800" b="0" i="1" u="none" dirty="0">
+                    <a:solidFill>
+                      <a:srgbClr val="C00000"/>
+                    </a:solidFill>
+                    <a:effectLst/>
+                    <a:latin typeface="Times New Roman" pitchFamily="28"/>
+                    <a:ea typeface="仿宋" pitchFamily="28"/>
+                  </a:rPr>
+                  <a:t>F</a:t>
+                </a:r>
+                <a:r>
+                  <a:rPr lang="zh-CN" altLang="zh-CN" sz="2800" b="0" i="0" u="none" dirty="0">
+                    <a:solidFill>
+                      <a:srgbClr val="C00000"/>
+                    </a:solidFill>
+                    <a:effectLst/>
+                    <a:latin typeface="Times New Roman" pitchFamily="28"/>
+                    <a:ea typeface="仿宋" pitchFamily="28"/>
+                  </a:rPr>
+                  <a:t>＋</a:t>
+                </a:r>
+                <a:r>
+                  <a:rPr lang="zh-CN" altLang="zh-CN" sz="2800" b="0" i="1" u="none" dirty="0">
+                    <a:solidFill>
+                      <a:srgbClr val="C00000"/>
+                    </a:solidFill>
+                    <a:effectLst/>
+                    <a:latin typeface="Times New Roman" pitchFamily="28"/>
+                    <a:ea typeface="仿宋" pitchFamily="28"/>
+                  </a:rPr>
+                  <a:t>F</a:t>
+                </a:r>
+                <a:r>
+                  <a:rPr lang="zh-CN" altLang="zh-CN" sz="2800" b="0" i="0" u="none" baseline="-25000" dirty="0">
+                    <a:solidFill>
+                      <a:srgbClr val="C00000"/>
+                    </a:solidFill>
+                    <a:effectLst/>
+                    <a:latin typeface="Times New Roman" pitchFamily="28"/>
+                    <a:ea typeface="仿宋" pitchFamily="28"/>
+                  </a:rPr>
+                  <a:t>N</a:t>
+                </a:r>
+                <a:r>
+                  <a:rPr lang="zh-CN" altLang="zh-CN" sz="2800" b="0" i="0" u="none" dirty="0">
+                    <a:solidFill>
+                      <a:srgbClr val="C00000"/>
+                    </a:solidFill>
+                    <a:effectLst/>
+                    <a:latin typeface="Times New Roman" pitchFamily="28"/>
+                    <a:ea typeface="仿宋" pitchFamily="28"/>
+                  </a:rPr>
+                  <a:t>－</a:t>
+                </a:r>
+                <a:r>
+                  <a:rPr lang="zh-CN" altLang="zh-CN" sz="2800" b="0" i="1" u="none" dirty="0">
+                    <a:solidFill>
+                      <a:srgbClr val="C00000"/>
+                    </a:solidFill>
+                    <a:effectLst/>
+                    <a:latin typeface="Times New Roman" pitchFamily="28"/>
+                    <a:ea typeface="仿宋" pitchFamily="28"/>
+                  </a:rPr>
+                  <a:t>mg</a:t>
+                </a:r>
+                <a:r>
+                  <a:rPr lang="zh-CN" altLang="zh-CN" sz="2800" b="0" i="0" u="none" dirty="0">
+                    <a:solidFill>
+                      <a:srgbClr val="C00000"/>
+                    </a:solidFill>
+                    <a:effectLst/>
+                    <a:latin typeface="Times New Roman" pitchFamily="28"/>
+                    <a:ea typeface="仿宋" pitchFamily="28"/>
+                  </a:rPr>
+                  <a:t>cos </a:t>
+                </a:r>
+                <a:r>
+                  <a:rPr lang="zh-CN" altLang="zh-CN" sz="2800" b="0" i="1" u="none" dirty="0">
+                    <a:solidFill>
+                      <a:srgbClr val="C00000"/>
+                    </a:solidFill>
+                    <a:effectLst/>
+                    <a:latin typeface="Times New Roman" pitchFamily="28"/>
+                    <a:ea typeface="Times New Roman" pitchFamily="28"/>
+                  </a:rPr>
+                  <a:t>θ</a:t>
+                </a:r>
+                <a:r>
+                  <a:rPr lang="zh-CN" altLang="zh-CN" sz="2800" b="0" i="0" u="none" dirty="0">
+                    <a:solidFill>
+                      <a:srgbClr val="C00000"/>
+                    </a:solidFill>
+                    <a:effectLst/>
+                    <a:latin typeface="Times New Roman" pitchFamily="28"/>
+                    <a:ea typeface="仿宋" pitchFamily="28"/>
+                  </a:rPr>
+                  <a:t>=0</a:t>
+                </a:r>
+              </a:p>
+              <a:p>
+                <a:pPr marL="354965" algn="l" eaLnBrk="1" latinLnBrk="0" hangingPunct="0">
+                  <a:lnSpc>
+                    <a:spcPct val="140000"/>
+                  </a:lnSpc>
+                </a:pPr>
+                <a:r>
+                  <a:rPr lang="zh-CN" altLang="zh-CN" sz="2800" b="0" i="0" u="none" dirty="0">
+                    <a:solidFill>
+                      <a:srgbClr val="C00000"/>
+                    </a:solidFill>
+                    <a:effectLst/>
+                    <a:latin typeface="Times New Roman" pitchFamily="28"/>
+                    <a:ea typeface="仿宋" pitchFamily="28"/>
+                  </a:rPr>
+                  <a:t>其中洛伦兹力</a:t>
+                </a:r>
+                <a:r>
+                  <a:rPr lang="zh-CN" altLang="zh-CN" sz="2800" b="0" i="1" u="none" dirty="0">
+                    <a:solidFill>
+                      <a:srgbClr val="C00000"/>
+                    </a:solidFill>
+                    <a:effectLst/>
+                    <a:latin typeface="Times New Roman" pitchFamily="28"/>
+                    <a:ea typeface="仿宋" pitchFamily="28"/>
+                  </a:rPr>
+                  <a:t>F</a:t>
+                </a:r>
+                <a:r>
+                  <a:rPr lang="zh-CN" altLang="zh-CN" sz="2800" b="0" i="0" u="none" dirty="0">
+                    <a:solidFill>
+                      <a:srgbClr val="C00000"/>
+                    </a:solidFill>
+                    <a:effectLst/>
+                    <a:latin typeface="Times New Roman" pitchFamily="28"/>
+                    <a:ea typeface="仿宋" pitchFamily="28"/>
+                  </a:rPr>
+                  <a:t>=</a:t>
+                </a:r>
+                <a:r>
+                  <a:rPr lang="zh-CN" altLang="zh-CN" sz="2800" b="0" i="1" u="none" dirty="0">
+                    <a:solidFill>
+                      <a:srgbClr val="C00000"/>
+                    </a:solidFill>
+                    <a:effectLst/>
+                    <a:latin typeface="Times New Roman" pitchFamily="28"/>
+                    <a:ea typeface="仿宋" pitchFamily="28"/>
+                  </a:rPr>
+                  <a:t>qvB</a:t>
+                </a:r>
+              </a:p>
+              <a:p>
+                <a:pPr marL="354965" algn="l" eaLnBrk="1" latinLnBrk="0" hangingPunct="0">
+                  <a:lnSpc>
+                    <a:spcPct val="140000"/>
+                  </a:lnSpc>
+                </a:pPr>
+                <a:r>
+                  <a:rPr lang="zh-CN" altLang="zh-CN" sz="2800" b="0" i="0" u="none" dirty="0">
+                    <a:solidFill>
+                      <a:srgbClr val="C00000"/>
+                    </a:solidFill>
+                    <a:effectLst/>
+                    <a:latin typeface="Times New Roman" pitchFamily="28"/>
+                    <a:ea typeface="仿宋" pitchFamily="28"/>
+                  </a:rPr>
+                  <a:t>设下滑距离</a:t>
+                </a:r>
+                <a:r>
+                  <a:rPr lang="zh-CN" altLang="zh-CN" sz="2800" b="0" i="1" u="none" dirty="0">
+                    <a:solidFill>
+                      <a:srgbClr val="C00000"/>
+                    </a:solidFill>
+                    <a:effectLst/>
+                    <a:latin typeface="Times New Roman" pitchFamily="28"/>
+                    <a:ea typeface="仿宋" pitchFamily="28"/>
+                  </a:rPr>
+                  <a:t>x</a:t>
+                </a:r>
+                <a:r>
+                  <a:rPr lang="zh-CN" altLang="zh-CN" sz="2800" b="0" i="0" u="none" dirty="0">
+                    <a:solidFill>
+                      <a:srgbClr val="C00000"/>
+                    </a:solidFill>
+                    <a:effectLst/>
+                    <a:latin typeface="Times New Roman" pitchFamily="28"/>
+                    <a:ea typeface="仿宋" pitchFamily="28"/>
+                    <a:sym typeface="_⨹_17_f2527"/>
+                  </a:rPr>
+                  <a:t>时离开斜面，此时斜面对小球的支持力</a:t>
+                </a:r>
+                <a:br>
+                  <a:rPr lang="zh-CN" altLang="zh-CN" sz="2800" b="0" i="0" u="none" dirty="0">
+                    <a:solidFill>
+                      <a:srgbClr val="C00000"/>
+                    </a:solidFill>
+                    <a:effectLst/>
+                    <a:latin typeface="Times New Roman" pitchFamily="28"/>
+                    <a:ea typeface="仿宋" pitchFamily="28"/>
+                  </a:rPr>
+                </a:br>
+                <a:r>
+                  <a:rPr lang="zh-CN" altLang="zh-CN" sz="2800" b="0" i="1" u="none" dirty="0">
+                    <a:solidFill>
+                      <a:srgbClr val="C00000"/>
+                    </a:solidFill>
+                    <a:effectLst/>
+                    <a:latin typeface="Times New Roman" pitchFamily="28"/>
+                    <a:ea typeface="仿宋" pitchFamily="28"/>
+                  </a:rPr>
+                  <a:t>F</a:t>
+                </a:r>
+                <a:r>
+                  <a:rPr lang="zh-CN" altLang="zh-CN" sz="2800" b="0" i="0" u="none" baseline="-25000" dirty="0">
+                    <a:solidFill>
+                      <a:srgbClr val="C00000"/>
+                    </a:solidFill>
+                    <a:effectLst/>
+                    <a:latin typeface="Times New Roman" pitchFamily="28"/>
+                    <a:ea typeface="仿宋" pitchFamily="28"/>
+                  </a:rPr>
+                  <a:t>N</a:t>
+                </a:r>
+                <a:r>
+                  <a:rPr lang="zh-CN" altLang="zh-CN" sz="2800" b="0" i="0" u="none" dirty="0">
+                    <a:solidFill>
+                      <a:srgbClr val="C00000"/>
+                    </a:solidFill>
+                    <a:effectLst/>
+                    <a:latin typeface="Times New Roman" pitchFamily="28"/>
+                    <a:ea typeface="仿宋" pitchFamily="28"/>
+                  </a:rPr>
+                  <a:t>=0</a:t>
+                </a:r>
+              </a:p>
+              <a:p>
+                <a:pPr marL="354965" algn="l" eaLnBrk="1" latinLnBrk="0" hangingPunct="0">
+                  <a:lnSpc>
+                    <a:spcPct val="140000"/>
+                  </a:lnSpc>
+                </a:pPr>
+                <a:r>
+                  <a:rPr lang="zh-CN" altLang="zh-CN" sz="2800" b="0" i="0" u="none" dirty="0">
+                    <a:solidFill>
+                      <a:srgbClr val="C00000"/>
+                    </a:solidFill>
+                    <a:effectLst/>
+                    <a:latin typeface="Times New Roman" pitchFamily="28"/>
+                    <a:ea typeface="仿宋" pitchFamily="28"/>
+                  </a:rPr>
+                  <a:t>由</a:t>
+                </a:r>
+                <a:r>
+                  <a:rPr lang="zh-CN" altLang="zh-CN" sz="2800" b="0" i="1" u="none" dirty="0">
+                    <a:solidFill>
+                      <a:srgbClr val="C00000"/>
+                    </a:solidFill>
+                    <a:effectLst/>
+                    <a:latin typeface="Times New Roman" pitchFamily="28"/>
+                    <a:ea typeface="仿宋" pitchFamily="28"/>
+                  </a:rPr>
+                  <a:t>v</a:t>
+                </a:r>
+                <a:r>
+                  <a:rPr lang="zh-CN" altLang="zh-CN" sz="2800" b="0" i="0" u="none" baseline="30000" dirty="0">
+                    <a:solidFill>
+                      <a:srgbClr val="C00000"/>
+                    </a:solidFill>
+                    <a:effectLst/>
+                    <a:latin typeface="Times New Roman" pitchFamily="28"/>
+                    <a:ea typeface="仿宋" pitchFamily="28"/>
+                  </a:rPr>
+                  <a:t>2</a:t>
+                </a:r>
+                <a:r>
+                  <a:rPr lang="zh-CN" altLang="zh-CN" sz="2800" b="0" i="0" u="none" dirty="0">
+                    <a:solidFill>
+                      <a:srgbClr val="C00000"/>
+                    </a:solidFill>
+                    <a:effectLst/>
+                    <a:latin typeface="Times New Roman" pitchFamily="28"/>
+                    <a:ea typeface="仿宋" pitchFamily="28"/>
+                  </a:rPr>
+                  <a:t>=2</a:t>
+                </a:r>
+                <a:r>
+                  <a:rPr lang="zh-CN" altLang="zh-CN" sz="2800" b="0" i="1" u="none" dirty="0">
+                    <a:solidFill>
+                      <a:srgbClr val="C00000"/>
+                    </a:solidFill>
+                    <a:effectLst/>
+                    <a:latin typeface="Times New Roman" pitchFamily="28"/>
+                    <a:ea typeface="仿宋" pitchFamily="28"/>
+                  </a:rPr>
+                  <a:t>ax</a:t>
+                </a:r>
+                <a:r>
+                  <a:rPr lang="zh-CN" altLang="zh-CN" sz="2800" b="0" i="0" u="none" dirty="0">
+                    <a:solidFill>
+                      <a:srgbClr val="C00000"/>
+                    </a:solidFill>
+                    <a:effectLst/>
+                    <a:latin typeface="Times New Roman" pitchFamily="28"/>
+                    <a:ea typeface="仿宋" pitchFamily="28"/>
+                  </a:rPr>
+                  <a:t>得下滑的距离</a:t>
+                </a:r>
+                <a:r>
+                  <a:rPr lang="zh-CN" altLang="zh-CN" sz="2800" b="0" i="1" u="none" dirty="0">
+                    <a:solidFill>
+                      <a:srgbClr val="C00000"/>
+                    </a:solidFill>
+                    <a:effectLst/>
+                    <a:latin typeface="Times New Roman" pitchFamily="28"/>
+                    <a:ea typeface="仿宋" pitchFamily="28"/>
+                  </a:rPr>
+                  <a:t>x</a:t>
+                </a:r>
+                <a:r>
+                  <a:rPr lang="zh-CN" altLang="zh-CN" sz="2800" b="0" i="0" u="none" dirty="0">
+                    <a:solidFill>
+                      <a:srgbClr val="C00000"/>
+                    </a:solidFill>
+                    <a:effectLst/>
+                    <a:latin typeface="Times New Roman" pitchFamily="28"/>
+                    <a:ea typeface="仿宋" pitchFamily="28"/>
+                  </a:rPr>
+                  <a:t>=</a:t>
+                </a:r>
+                <a14:m>
+                  <m:oMath xmlns:m="http://schemas.openxmlformats.org/officeDocument/2006/math">
+                    <m:f>
+                      <m:fPr>
+                        <m:ctrlPr>
+                          <a:rPr lang="en-US" altLang="zh-CN" sz="2800" b="0" i="1">
+                            <a:solidFill>
+                              <a:srgbClr val="C00000"/>
+                            </a:solidFill>
+                            <a:effectLst/>
+                            <a:latin typeface="Cambria Math" panose="02040503050406030204" pitchFamily="18" charset="0"/>
+                            <a:ea typeface="Cambria Math" panose="02040503050406030204" pitchFamily="56" charset="0"/>
+                          </a:rPr>
+                        </m:ctrlPr>
+                      </m:fPr>
+                      <m:num>
+                        <m:sSup>
+                          <m:sSupPr>
+                            <m:ctrlPr>
+                              <a:rPr lang="en-US" altLang="zh-CN" sz="2800" b="0" i="1">
+                                <a:solidFill>
+                                  <a:srgbClr val="C00000"/>
+                                </a:solidFill>
+                                <a:effectLst/>
+                                <a:latin typeface="Cambria Math" panose="02040503050406030204" pitchFamily="56" charset="0"/>
+                                <a:ea typeface="Cambria Math" panose="02040503050406030204" pitchFamily="56" charset="0"/>
+                              </a:rPr>
+                            </m:ctrlPr>
+                          </m:sSupPr>
+                          <m:e>
+                            <m:r>
+                              <a:rPr lang="en-US" altLang="zh-CN" sz="2800" b="0" i="1">
+                                <a:solidFill>
+                                  <a:srgbClr val="C00000"/>
+                                </a:solidFill>
+                                <a:effectLst/>
+                                <a:latin typeface="Cambria Math" panose="02040503050406030204" pitchFamily="56" charset="0"/>
+                                <a:ea typeface="Cambria Math" panose="02040503050406030204" pitchFamily="56" charset="0"/>
+                              </a:rPr>
+                              <m:t>𝑣</m:t>
+                            </m:r>
+                          </m:e>
+                          <m:sup>
+                            <m:r>
+                              <a:rPr lang="en-US" altLang="zh-CN" sz="2800" b="0" i="1">
+                                <a:solidFill>
+                                  <a:srgbClr val="C00000"/>
+                                </a:solidFill>
+                                <a:effectLst/>
+                                <a:latin typeface="Cambria Math" panose="02040503050406030204" pitchFamily="56" charset="0"/>
+                                <a:ea typeface="Cambria Math" panose="02040503050406030204" pitchFamily="56" charset="0"/>
+                              </a:rPr>
+                              <m:t>2</m:t>
+                            </m:r>
+                          </m:sup>
+                        </m:sSup>
+                      </m:num>
+                      <m:den>
+                        <m:r>
+                          <a:rPr lang="en-US" altLang="zh-CN" sz="2800" b="0" i="1">
+                            <a:solidFill>
+                              <a:srgbClr val="C00000"/>
+                            </a:solidFill>
+                            <a:effectLst/>
+                            <a:latin typeface="Cambria Math" panose="02040503050406030204" pitchFamily="56" charset="0"/>
+                            <a:ea typeface="Cambria Math" panose="02040503050406030204" pitchFamily="56" charset="0"/>
+                          </a:rPr>
+                          <m:t>2</m:t>
+                        </m:r>
+                        <m:r>
+                          <a:rPr lang="en-US" altLang="zh-CN" sz="2800" b="0" i="1">
+                            <a:solidFill>
+                              <a:srgbClr val="C00000"/>
+                            </a:solidFill>
+                            <a:effectLst/>
+                            <a:latin typeface="Cambria Math" panose="02040503050406030204" pitchFamily="56" charset="0"/>
+                            <a:ea typeface="Cambria Math" panose="02040503050406030204" pitchFamily="56" charset="0"/>
+                          </a:rPr>
+                          <m:t>𝑎</m:t>
+                        </m:r>
+                      </m:den>
+                    </m:f>
+                  </m:oMath>
+                </a14:m>
+                <a:endParaRPr lang="en-US" altLang="zh-CN" sz="2800" b="0" i="0" u="none" dirty="0">
+                  <a:solidFill>
+                    <a:srgbClr val="C00000"/>
+                  </a:solidFill>
+                  <a:effectLst/>
+                  <a:latin typeface="Times New Roman" pitchFamily="28"/>
+                  <a:ea typeface="仿宋" pitchFamily="28"/>
+                </a:endParaRPr>
+              </a:p>
+              <a:p>
+                <a:pPr marL="354965" hangingPunct="0">
+                  <a:lnSpc>
+                    <a:spcPct val="140000"/>
+                  </a:lnSpc>
+                </a:pPr>
+                <a:r>
+                  <a:rPr lang="zh-CN" altLang="zh-CN" sz="2800" dirty="0">
+                    <a:solidFill>
+                      <a:srgbClr val="C00000"/>
+                    </a:solidFill>
+                    <a:latin typeface="Times New Roman" pitchFamily="28"/>
+                    <a:ea typeface="仿宋" pitchFamily="28"/>
+                  </a:rPr>
+                  <a:t>联立以上各式解得</a:t>
+                </a:r>
+                <a:r>
+                  <a:rPr lang="zh-CN" altLang="zh-CN" sz="2800" i="1" dirty="0">
+                    <a:solidFill>
+                      <a:srgbClr val="C00000"/>
+                    </a:solidFill>
+                    <a:latin typeface="Times New Roman" pitchFamily="28"/>
+                    <a:ea typeface="仿宋" pitchFamily="28"/>
+                  </a:rPr>
+                  <a:t>x</a:t>
+                </a:r>
+                <a:r>
+                  <a:rPr lang="zh-CN" altLang="zh-CN" sz="2800" dirty="0">
+                    <a:solidFill>
+                      <a:srgbClr val="C00000"/>
+                    </a:solidFill>
+                    <a:latin typeface="Times New Roman" pitchFamily="28"/>
+                    <a:ea typeface="仿宋" pitchFamily="28"/>
+                  </a:rPr>
+                  <a:t>=</a:t>
+                </a:r>
+                <a14:m>
+                  <m:oMath xmlns:m="http://schemas.openxmlformats.org/officeDocument/2006/math">
+                    <m:f>
+                      <m:fPr>
+                        <m:ctrlPr>
+                          <a:rPr lang="en-US" altLang="zh-CN" sz="2800" i="1">
+                            <a:solidFill>
+                              <a:srgbClr val="C00000"/>
+                            </a:solidFill>
+                            <a:latin typeface="Cambria Math" panose="02040503050406030204" pitchFamily="18" charset="0"/>
+                            <a:ea typeface="Cambria Math" panose="02040503050406030204" pitchFamily="56" charset="0"/>
+                          </a:rPr>
+                        </m:ctrlPr>
+                      </m:fPr>
+                      <m:num>
+                        <m:sSup>
+                          <m:sSupPr>
+                            <m:ctrlPr>
+                              <a:rPr lang="en-US" altLang="zh-CN" sz="2800" i="1">
+                                <a:solidFill>
+                                  <a:srgbClr val="C00000"/>
+                                </a:solidFill>
+                                <a:latin typeface="Cambria Math" panose="02040503050406030204" pitchFamily="56" charset="0"/>
+                                <a:ea typeface="Cambria Math" panose="02040503050406030204" pitchFamily="56" charset="0"/>
+                              </a:rPr>
+                            </m:ctrlPr>
+                          </m:sSupPr>
+                          <m:e>
+                            <m:r>
+                              <a:rPr lang="en-US" altLang="zh-CN" sz="2800" i="1">
+                                <a:solidFill>
+                                  <a:srgbClr val="C00000"/>
+                                </a:solidFill>
+                                <a:latin typeface="Cambria Math" panose="02040503050406030204" pitchFamily="56" charset="0"/>
+                                <a:ea typeface="Cambria Math" panose="02040503050406030204" pitchFamily="56" charset="0"/>
+                              </a:rPr>
+                              <m:t>𝑚</m:t>
+                            </m:r>
+                          </m:e>
+                          <m:sup>
+                            <m:r>
+                              <a:rPr lang="en-US" altLang="zh-CN" sz="2800" i="1">
+                                <a:solidFill>
+                                  <a:srgbClr val="C00000"/>
+                                </a:solidFill>
+                                <a:latin typeface="Cambria Math" panose="02040503050406030204" pitchFamily="56" charset="0"/>
+                                <a:ea typeface="Cambria Math" panose="02040503050406030204" pitchFamily="56" charset="0"/>
+                              </a:rPr>
+                              <m:t>2</m:t>
+                            </m:r>
+                          </m:sup>
+                        </m:sSup>
+                        <m:r>
+                          <a:rPr lang="en-US" altLang="zh-CN" sz="2800" i="1">
+                            <a:solidFill>
+                              <a:srgbClr val="C00000"/>
+                            </a:solidFill>
+                            <a:latin typeface="Cambria Math" panose="02040503050406030204" pitchFamily="56" charset="0"/>
+                            <a:ea typeface="Cambria Math" panose="02040503050406030204" pitchFamily="56" charset="0"/>
+                          </a:rPr>
+                          <m:t>𝑔</m:t>
+                        </m:r>
+                        <m:r>
+                          <m:rPr>
+                            <m:sty m:val="p"/>
+                          </m:rPr>
+                          <a:rPr lang="en-US" altLang="zh-CN" sz="2800">
+                            <a:solidFill>
+                              <a:srgbClr val="C00000"/>
+                            </a:solidFill>
+                            <a:latin typeface="Cambria Math" panose="02040503050406030204" pitchFamily="56" charset="0"/>
+                            <a:ea typeface="Cambria Math" panose="02040503050406030204" pitchFamily="56" charset="0"/>
+                          </a:rPr>
+                          <m:t>co</m:t>
+                        </m:r>
+                        <m:sSup>
+                          <m:sSupPr>
+                            <m:ctrlPr>
+                              <a:rPr lang="en-US" altLang="zh-CN" sz="2800">
+                                <a:solidFill>
+                                  <a:srgbClr val="C00000"/>
+                                </a:solidFill>
+                                <a:latin typeface="Cambria Math" panose="02040503050406030204" pitchFamily="56" charset="0"/>
+                                <a:ea typeface="Cambria Math" panose="02040503050406030204" pitchFamily="56" charset="0"/>
+                              </a:rPr>
+                            </m:ctrlPr>
+                          </m:sSupPr>
+                          <m:e>
+                            <m:r>
+                              <m:rPr>
+                                <m:sty m:val="p"/>
+                              </m:rPr>
+                              <a:rPr lang="en-US" altLang="zh-CN" sz="2800">
+                                <a:solidFill>
+                                  <a:srgbClr val="C00000"/>
+                                </a:solidFill>
+                                <a:latin typeface="Cambria Math" panose="02040503050406030204" pitchFamily="56" charset="0"/>
+                                <a:ea typeface="Cambria Math" panose="02040503050406030204" pitchFamily="56" charset="0"/>
+                              </a:rPr>
+                              <m:t>s</m:t>
+                            </m:r>
+                          </m:e>
+                          <m:sup>
+                            <m:r>
+                              <a:rPr lang="en-US" altLang="zh-CN" sz="2800" i="1">
+                                <a:solidFill>
+                                  <a:srgbClr val="C00000"/>
+                                </a:solidFill>
+                                <a:latin typeface="Cambria Math" panose="02040503050406030204" pitchFamily="56" charset="0"/>
+                                <a:ea typeface="Cambria Math" panose="02040503050406030204" pitchFamily="56" charset="0"/>
+                              </a:rPr>
+                              <m:t>2</m:t>
+                            </m:r>
+                          </m:sup>
+                        </m:sSup>
+                        <m:r>
+                          <m:rPr>
+                            <m:nor/>
+                          </m:rPr>
+                          <a:rPr lang="en-US" altLang="zh-CN" sz="2800" i="0">
+                            <a:solidFill>
+                              <a:srgbClr val="C00000"/>
+                            </a:solidFill>
+                            <a:latin typeface="Cambria Math" panose="02040503050406030204" pitchFamily="56" charset="0"/>
+                            <a:ea typeface="宋体" panose="02040503050406030204" pitchFamily="56" charset="0"/>
+                          </a:rPr>
+                          <m:t>θ</m:t>
+                        </m:r>
+                      </m:num>
+                      <m:den>
+                        <m:r>
+                          <a:rPr lang="en-US" altLang="zh-CN" sz="2800" i="1">
+                            <a:solidFill>
+                              <a:srgbClr val="C00000"/>
+                            </a:solidFill>
+                            <a:latin typeface="Cambria Math" panose="02040503050406030204" pitchFamily="56" charset="0"/>
+                            <a:ea typeface="Cambria Math" panose="02040503050406030204" pitchFamily="56" charset="0"/>
+                          </a:rPr>
+                          <m:t>2</m:t>
+                        </m:r>
+                        <m:sSup>
+                          <m:sSupPr>
+                            <m:ctrlPr>
+                              <a:rPr lang="en-US" altLang="zh-CN" sz="2800" i="1">
+                                <a:solidFill>
+                                  <a:srgbClr val="C00000"/>
+                                </a:solidFill>
+                                <a:latin typeface="Cambria Math" panose="02040503050406030204" pitchFamily="56" charset="0"/>
+                                <a:ea typeface="Cambria Math" panose="02040503050406030204" pitchFamily="56" charset="0"/>
+                              </a:rPr>
+                            </m:ctrlPr>
+                          </m:sSupPr>
+                          <m:e>
+                            <m:r>
+                              <a:rPr lang="en-US" altLang="zh-CN" sz="2800" i="1">
+                                <a:solidFill>
+                                  <a:srgbClr val="C00000"/>
+                                </a:solidFill>
+                                <a:latin typeface="Cambria Math" panose="02040503050406030204" pitchFamily="56" charset="0"/>
+                                <a:ea typeface="Cambria Math" panose="02040503050406030204" pitchFamily="56" charset="0"/>
+                              </a:rPr>
+                              <m:t>𝑞</m:t>
+                            </m:r>
+                          </m:e>
+                          <m:sup>
+                            <m:r>
+                              <a:rPr lang="en-US" altLang="zh-CN" sz="2800" i="1">
+                                <a:solidFill>
+                                  <a:srgbClr val="C00000"/>
+                                </a:solidFill>
+                                <a:latin typeface="Cambria Math" panose="02040503050406030204" pitchFamily="56" charset="0"/>
+                                <a:ea typeface="Cambria Math" panose="02040503050406030204" pitchFamily="56" charset="0"/>
+                              </a:rPr>
+                              <m:t>2</m:t>
+                            </m:r>
+                          </m:sup>
+                        </m:sSup>
+                        <m:sSup>
+                          <m:sSupPr>
+                            <m:ctrlPr>
+                              <a:rPr lang="en-US" altLang="zh-CN" sz="2800" i="1">
+                                <a:solidFill>
+                                  <a:srgbClr val="C00000"/>
+                                </a:solidFill>
+                                <a:latin typeface="Cambria Math" panose="02040503050406030204" pitchFamily="56" charset="0"/>
+                                <a:ea typeface="Cambria Math" panose="02040503050406030204" pitchFamily="56" charset="0"/>
+                              </a:rPr>
+                            </m:ctrlPr>
+                          </m:sSupPr>
+                          <m:e>
+                            <m:r>
+                              <a:rPr lang="en-US" altLang="zh-CN" sz="2800" i="1">
+                                <a:solidFill>
+                                  <a:srgbClr val="C00000"/>
+                                </a:solidFill>
+                                <a:latin typeface="Cambria Math" panose="02040503050406030204" pitchFamily="56" charset="0"/>
+                                <a:ea typeface="Cambria Math" panose="02040503050406030204" pitchFamily="56" charset="0"/>
+                              </a:rPr>
+                              <m:t>𝐵</m:t>
+                            </m:r>
+                          </m:e>
+                          <m:sup>
+                            <m:r>
+                              <a:rPr lang="en-US" altLang="zh-CN" sz="2800" i="1">
+                                <a:solidFill>
+                                  <a:srgbClr val="C00000"/>
+                                </a:solidFill>
+                                <a:latin typeface="Cambria Math" panose="02040503050406030204" pitchFamily="56" charset="0"/>
+                                <a:ea typeface="Cambria Math" panose="02040503050406030204" pitchFamily="56" charset="0"/>
+                              </a:rPr>
+                              <m:t>2</m:t>
+                            </m:r>
+                          </m:sup>
+                        </m:sSup>
+                        <m:r>
+                          <m:rPr>
+                            <m:sty m:val="p"/>
+                          </m:rPr>
+                          <a:rPr lang="en-US" altLang="zh-CN" sz="2800">
+                            <a:solidFill>
+                              <a:srgbClr val="C00000"/>
+                            </a:solidFill>
+                            <a:latin typeface="Cambria Math" panose="02040503050406030204" pitchFamily="56" charset="0"/>
+                            <a:ea typeface="Cambria Math" panose="02040503050406030204" pitchFamily="56" charset="0"/>
+                          </a:rPr>
+                          <m:t>sin</m:t>
+                        </m:r>
+                        <m:r>
+                          <m:rPr>
+                            <m:nor/>
+                          </m:rPr>
+                          <a:rPr lang="en-US" altLang="zh-CN" sz="2800" i="0">
+                            <a:solidFill>
+                              <a:srgbClr val="C00000"/>
+                            </a:solidFill>
+                            <a:latin typeface="Cambria Math" panose="02040503050406030204" pitchFamily="56" charset="0"/>
+                            <a:ea typeface="宋体" panose="02040503050406030204" pitchFamily="56" charset="0"/>
+                          </a:rPr>
+                          <m:t>θ</m:t>
+                        </m:r>
+                      </m:den>
+                    </m:f>
+                  </m:oMath>
+                </a14:m>
+                <a:r>
+                  <a:rPr lang="zh-CN" altLang="zh-CN" sz="2800" dirty="0">
+                    <a:solidFill>
+                      <a:srgbClr val="C00000"/>
+                    </a:solidFill>
+                    <a:latin typeface="Times New Roman" pitchFamily="28"/>
+                    <a:ea typeface="仿宋" pitchFamily="28"/>
+                  </a:rPr>
+                  <a:t>。</a:t>
+                </a:r>
+                <a:endParaRPr lang="zh-CN" altLang="en-US" sz="2800" dirty="0">
+                  <a:solidFill>
+                    <a:srgbClr val="C00000"/>
+                  </a:solidFill>
+                </a:endParaRPr>
+              </a:p>
+            </p:txBody>
+          </p:sp>
+        </mc:Choice>
+        <mc:Fallback xmlns="">
+          <p:sp>
+            <p:nvSpPr>
+              <p:cNvPr id="10540" name="yt_shape_10540"/>
+              <p:cNvSpPr txBox="1">
+                <a:spLocks noRot="1" noChangeAspect="1" noMove="1" noResize="1" noEditPoints="1" noAdjustHandles="1" noChangeArrowheads="1" noChangeShapeType="1" noTextEdit="1"/>
+              </p:cNvSpPr>
+              <p:nvPr/>
+            </p:nvSpPr>
+            <p:spPr>
+              <a:xfrm>
+                <a:off x="324071" y="467999"/>
+                <a:ext cx="9383332" cy="6110601"/>
+              </a:xfrm>
+              <a:prstGeom prst="rect">
+                <a:avLst/>
+              </a:prstGeom>
+              <a:blipFill>
+                <a:blip r:embed="rId2"/>
+                <a:stretch>
+                  <a:fillRect t="-399" b="-499"/>
+                </a:stretch>
+              </a:blipFill>
+            </p:spPr>
+            <p:txBody>
+              <a:bodyPr/>
+              <a:lstStyle/>
+              <a:p>
+                <a:r>
+                  <a:rPr lang="zh-CN" altLang="en-US">
+                    <a:noFill/>
+                  </a:rPr>
+                  <a:t> </a:t>
+                </a:r>
+              </a:p>
+            </p:txBody>
+          </p:sp>
+        </mc:Fallback>
+      </mc:AlternateContent>
+      <p:pic>
+        <p:nvPicPr>
+          <p:cNvPr id="3" name="图片 2">
+            <a:extLst>
+              <a:ext uri="{FF2B5EF4-FFF2-40B4-BE49-F238E27FC236}">
+                <a16:creationId xmlns:a16="http://schemas.microsoft.com/office/drawing/2014/main" id="{9D53F4A9-E170-D497-9A1C-452B8B8AB267}"/>
+              </a:ext>
+            </a:extLst>
+          </p:cNvPr>
+          <p:cNvPicPr>
+            <a:picLocks/>
+          </p:cNvPicPr>
+          <p:nvPr/>
+        </p:nvPicPr>
+        <p:blipFill>
+          <a:blip r:embed="rId3" cstate="print">
+            <a:extLst>
+              <a:ext uri="{28A0092B-C50C-407E-A947-70E740481C1C}">
+                <a14:useLocalDpi xmlns:a14="http://schemas.microsoft.com/office/drawing/2010/main" val="0"/>
+              </a:ext>
+            </a:extLst>
+          </a:blip>
+          <a:stretch>
+            <a:fillRect/>
+          </a:stretch>
+        </p:blipFill>
+        <p:spPr>
+          <a:xfrm>
+            <a:off x="9284202" y="1750699"/>
+            <a:ext cx="2469424" cy="1649941"/>
+          </a:xfrm>
+          <a:prstGeom prst="rect">
+            <a:avLst/>
+          </a:prstGeom>
+        </p:spPr>
+      </p:pic>
+    </p:spTree>
+  </p:cSld>
+  <p:clrMapOvr>
+    <a:masterClrMapping/>
+  </p:clrMapOvr>
+</p:sld>
+</file>
+
 <file path=ppt/slides/slide2.xml><?xml version="1.0" encoding="utf-8"?>
 <p:sld xmlns:a="http://schemas.openxmlformats.org/drawingml/2006/main" xmlns:r="http://schemas.openxmlformats.org/officeDocument/2006/relationships" xmlns:p="http://schemas.openxmlformats.org/presentationml/2006/main">
   <p:cSld>
@@ -6349,7 +10440,7 @@
               </p:txBody>
             </p:sp>
           </mc:Choice>
-          <mc:Fallback xmlns:p159="http://schemas.microsoft.com/office/powerpoint/2015/09/main" xmlns:p15="http://schemas.microsoft.com/office/powerpoint/2012/main" xmlns:p14="http://schemas.microsoft.com/office/powerpoint/2010/main" xmlns:wp="http://schemas.openxmlformats.org/drawingml/2006/wordprocessingDrawing" xmlns:w="http://schemas.openxmlformats.org/wordprocessingml/2006/main" xmlns:m="http://schemas.openxmlformats.org/officeDocument/2006/math" xmlns="">
+          <mc:Fallback xmlns="" xmlns:m="http://schemas.openxmlformats.org/officeDocument/2006/math" xmlns:w="http://schemas.openxmlformats.org/wordprocessingml/2006/main" xmlns:wp="http://schemas.openxmlformats.org/drawingml/2006/wordprocessingDrawing" xmlns:p14="http://schemas.microsoft.com/office/powerpoint/2010/main" xmlns:p15="http://schemas.microsoft.com/office/powerpoint/2012/main" xmlns:p159="http://schemas.microsoft.com/office/powerpoint/2015/09/main">
             <p:sp>
               <p:nvSpPr>
                 <p:cNvPr id="47" name="TextBox 63"/>
@@ -6504,7 +10595,7 @@
               </p:txBody>
             </p:sp>
           </mc:Choice>
-          <mc:Fallback xmlns:p159="http://schemas.microsoft.com/office/powerpoint/2015/09/main" xmlns:p15="http://schemas.microsoft.com/office/powerpoint/2012/main" xmlns:p14="http://schemas.microsoft.com/office/powerpoint/2010/main" xmlns:wp="http://schemas.openxmlformats.org/drawingml/2006/wordprocessingDrawing" xmlns:w="http://schemas.openxmlformats.org/wordprocessingml/2006/main" xmlns:m="http://schemas.openxmlformats.org/officeDocument/2006/math" xmlns="">
+          <mc:Fallback xmlns="" xmlns:m="http://schemas.openxmlformats.org/officeDocument/2006/math" xmlns:w="http://schemas.openxmlformats.org/wordprocessingml/2006/main" xmlns:wp="http://schemas.openxmlformats.org/drawingml/2006/wordprocessingDrawing" xmlns:p14="http://schemas.microsoft.com/office/powerpoint/2010/main" xmlns:p15="http://schemas.microsoft.com/office/powerpoint/2012/main" xmlns:p159="http://schemas.microsoft.com/office/powerpoint/2015/09/main">
             <p:sp>
               <p:nvSpPr>
                 <p:cNvPr id="50" name="TextBox 78"/>
